--- a/docs/reviews/downloads/AuxFlow-overview.pptx
+++ b/docs/reviews/downloads/AuxFlow-overview.pptx
@@ -18,6 +18,7 @@
     <p:sldId id="266" r:id="rId18"/>
     <p:sldId id="267" r:id="rId19"/>
     <p:sldId id="268" r:id="rId20"/>
+    <p:sldId id="269" r:id="rId21"/>
   </p:sldIdLst>
   <p:sldSz cx="12191695" cy="6858000" type="screen4x3"/>
   <p:notesSz cx="6858000" cy="9144000"/>
@@ -1479,7 +1480,7 @@
           <a:lstStyle/>
           <a:p>
             <a:r>
-              <a:t>State the limits yourself before the faculty ask. The three declared false negatives were predicted before implementation. They now classify UNKNOWN through syntactic guards. Threats to validity are in the evaluation report.</a:t>
+              <a:t>Source: docs/reference/package-support.md and language-subset.md. The package list is _MODELLED_PACKAGES in src/auxflow/semantic/resolve.py. Changing it changes the analysis contract.</a:t>
             </a:r>
           </a:p>
         </p:txBody>
@@ -1549,7 +1550,7 @@
           <a:lstStyle/>
           <a:p>
             <a:r>
-              <a:t>The VS Code extension never runs TeX. It bundles the analyzer.</a:t>
+              <a:t>Opacity is whole-document today. Per-file granularity is an open decision in the specification. The three declared false negatives b11, b12, b13 now classify UNKNOWN through syntactic guards. b07 and b15 are opaque by design.</a:t>
             </a:r>
           </a:p>
         </p:txBody>
@@ -1619,6 +1620,76 @@
           <a:lstStyle/>
           <a:p>
             <a:r>
+              <a:t>The VS Code extension never runs TeX. It bundles the analyzer. Avoid --force in a live demo of b08.</a:t>
+            </a:r>
+          </a:p>
+        </p:txBody>
+      </p:sp>
+      <p:sp>
+        <p:nvSpPr>
+          <p:cNvPr id="4" name="Slide Number Placeholder 3"/>
+          <p:cNvSpPr>
+            <a:spLocks noGrp="1"/>
+          </p:cNvSpPr>
+          <p:nvPr>
+            <p:ph type="sldNum" idx="5" sz="quarter"/>
+          </p:nvPr>
+        </p:nvSpPr>
+        <p:spPr/>
+      </p:sp>
+    </p:spTree>
+  </p:cSld>
+  <p:clrMapOvr>
+    <a:masterClrMapping/>
+  </p:clrMapOvr>
+</p:notes>
+</file>
+
+<file path=ppt/notesSlides/notesSlide14.xml><?xml version="1.0" encoding="utf-8"?>
+<p:notes xmlns:a="http://schemas.openxmlformats.org/drawingml/2006/main" xmlns:p="http://schemas.openxmlformats.org/presentationml/2006/main" xmlns:r="http://schemas.openxmlformats.org/officeDocument/2006/relationships">
+  <p:cSld>
+    <p:spTree>
+      <p:nvGrpSpPr>
+        <p:cNvPr id="1" name=""/>
+        <p:cNvGrpSpPr/>
+        <p:nvPr/>
+      </p:nvGrpSpPr>
+      <p:grpSpPr>
+        <a:xfrm>
+          <a:off x="0" y="0"/>
+          <a:ext cx="0" cy="0"/>
+          <a:chOff x="0" y="0"/>
+          <a:chExt cx="0" cy="0"/>
+        </a:xfrm>
+      </p:grpSpPr>
+      <p:sp>
+        <p:nvSpPr>
+          <p:cNvPr id="2" name="Slide Image Placeholder 1"/>
+          <p:cNvSpPr>
+            <a:spLocks noGrp="1"/>
+          </p:cNvSpPr>
+          <p:nvPr>
+            <p:ph type="sldImg" idx="2"/>
+          </p:nvPr>
+        </p:nvSpPr>
+        <p:spPr/>
+      </p:sp>
+      <p:sp>
+        <p:nvSpPr>
+          <p:cNvPr id="3" name="Notes Placeholder 2"/>
+          <p:cNvSpPr>
+            <a:spLocks noGrp="1"/>
+          </p:cNvSpPr>
+          <p:nvPr>
+            <p:ph type="body" idx="3" sz="quarter"/>
+          </p:nvPr>
+        </p:nvSpPr>
+        <p:spPr/>
+        <p:txBody>
+          <a:bodyPr/>
+          <a:lstStyle/>
+          <a:p>
+            <a:r>
               <a:t>Prepared answers. Package list: docs/reference/package-support.md. Declared false negatives: b11, b12, b13.</a:t>
             </a:r>
           </a:p>
@@ -2179,7 +2250,7 @@
           <a:lstStyle/>
           <a:p>
             <a:r>
-              <a:t>This mirrors analysis/classify.py. Precedence: amplifying cycle, then opaque facts, then plain cycle, then certified.</a:t>
+              <a:t>This mirrors analysis/classify.py. Precedence: amplifying cycle, then opaque facts, then plain cycle, then certified. A non-certified plan never has fewer than three engine runs, guarded by a property test.</a:t>
             </a:r>
           </a:p>
         </p:txBody>
@@ -6029,7 +6100,7 @@
                 </a:solidFill>
                 <a:latin typeface="Montserrat Alternates"/>
               </a:rPr>
-              <a:t>What it gets right, and where it stops</a:t>
+              <a:t>What AuxFlow understands today</a:t>
             </a:r>
           </a:p>
         </p:txBody>
@@ -6114,7 +6185,7 @@
                 </a:solidFill>
                 <a:latin typeface="Montserrat Alternates"/>
               </a:rPr>
-              <a:t>HONEST LIMITS</a:t>
+              <a:t>SUPPORTED</a:t>
             </a:r>
           </a:p>
         </p:txBody>
@@ -6251,8 +6322,8 @@
         </p:nvSpPr>
         <p:spPr>
           <a:xfrm>
-            <a:off x="822960" y="1920240"/>
-            <a:ext cx="5120640" cy="3840480"/>
+            <a:off x="822960" y="1874519"/>
+            <a:ext cx="3291840" cy="3794760"/>
           </a:xfrm>
           <a:prstGeom prst="roundRect">
             <a:avLst>
@@ -6299,8 +6370,8 @@
         </p:nvSpPr>
         <p:spPr>
           <a:xfrm>
-            <a:off x="822960" y="1920240"/>
-            <a:ext cx="5120640" cy="73152"/>
+            <a:off x="822960" y="1874519"/>
+            <a:ext cx="3291840" cy="73152"/>
           </a:xfrm>
           <a:prstGeom prst="rect">
             <a:avLst/>
@@ -6345,8 +6416,8 @@
         </p:nvSpPr>
         <p:spPr>
           <a:xfrm>
-            <a:off x="1097280" y="2148840"/>
-            <a:ext cx="4572000" cy="457200"/>
+            <a:off x="1005840" y="2057400"/>
+            <a:ext cx="2926080" cy="457200"/>
           </a:xfrm>
           <a:prstGeom prst="rect">
             <a:avLst/>
@@ -6365,13 +6436,13 @@
               </a:spcAft>
             </a:pPr>
             <a:r>
-              <a:rPr sz="2000" b="1">
+              <a:rPr sz="1800" b="1">
                 <a:solidFill>
                   <a:srgbClr val="34D399"/>
                 </a:solidFill>
                 <a:latin typeface="Montserrat Alternates"/>
               </a:rPr>
-              <a:t>Confirmed</a:t>
+              <a:t>Core constructs</a:t>
             </a:r>
           </a:p>
         </p:txBody>
@@ -6384,8 +6455,8 @@
         </p:nvSpPr>
         <p:spPr>
           <a:xfrm>
-            <a:off x="1097280" y="2788920"/>
-            <a:ext cx="4572000" cy="2926080"/>
+            <a:off x="1005840" y="2606040"/>
+            <a:ext cx="2971800" cy="3017520"/>
           </a:xfrm>
           <a:prstGeom prst="rect">
             <a:avLst/>
@@ -6404,13 +6475,13 @@
               </a:spcAft>
             </a:pPr>
             <a:r>
-              <a:rPr sz="1600" b="0">
+              <a:rPr sz="1100" b="0">
                 <a:solidFill>
                   <a:srgbClr val="E8EAF0"/>
                 </a:solidFill>
-                <a:latin typeface="Red Hat Display"/>
-              </a:rPr>
-              <a:t>All 15 documents classify as predicted.</a:t>
+                <a:latin typeface="Red Hat Mono"/>
+              </a:rPr>
+              <a:t>\label  \ref  \eqref</a:t>
             </a:r>
           </a:p>
           <a:p>
@@ -6420,13 +6491,13 @@
               </a:spcAft>
             </a:pPr>
             <a:r>
-              <a:rPr sz="1600" b="0">
+              <a:rPr sz="1100" b="0">
                 <a:solidFill>
                   <a:srgbClr val="E8EAF0"/>
                 </a:solidFill>
-                <a:latin typeface="Red Hat Display"/>
-              </a:rPr>
-              <a:t/>
+                <a:latin typeface="Red Hat Mono"/>
+              </a:rPr>
+              <a:t>\pageref</a:t>
             </a:r>
           </a:p>
           <a:p>
@@ -6436,13 +6507,13 @@
               </a:spcAft>
             </a:pPr>
             <a:r>
-              <a:rPr sz="1600" b="0">
+              <a:rPr sz="1100" b="0">
                 <a:solidFill>
                   <a:srgbClr val="E8EAF0"/>
                 </a:solidFill>
-                <a:latin typeface="Red Hat Display"/>
-              </a:rPr>
-              <a:t>latexmk, latexrun and Typst also fail on the amplifying case.</a:t>
+                <a:latin typeface="Red Hat Mono"/>
+              </a:rPr>
+              <a:t>\cite  \bibliography</a:t>
             </a:r>
           </a:p>
           <a:p>
@@ -6452,13 +6523,13 @@
               </a:spcAft>
             </a:pPr>
             <a:r>
-              <a:rPr sz="1600" b="0">
+              <a:rPr sz="1100" b="0">
                 <a:solidFill>
                   <a:srgbClr val="E8EAF0"/>
                 </a:solidFill>
-                <a:latin typeface="Red Hat Display"/>
-              </a:rPr>
-              <a:t/>
+                <a:latin typeface="Red Hat Mono"/>
+              </a:rPr>
+              <a:t>\tableofcontents</a:t>
             </a:r>
           </a:p>
           <a:p>
@@ -6468,13 +6539,141 @@
               </a:spcAft>
             </a:pPr>
             <a:r>
-              <a:rPr sz="1600" b="0">
+              <a:rPr sz="1100" b="0">
                 <a:solidFill>
                   <a:srgbClr val="E8EAF0"/>
                 </a:solidFill>
-                <a:latin typeface="Red Hat Display"/>
-              </a:rPr>
-              <a:t>Runtime verification catches what static analysis certifies wrongly.</a:t>
+                <a:latin typeface="Red Hat Mono"/>
+              </a:rPr>
+              <a:t>\listoffigures</a:t>
+            </a:r>
+          </a:p>
+          <a:p>
+            <a:pPr algn="l">
+              <a:spcAft>
+                <a:spcPts val="400"/>
+              </a:spcAft>
+            </a:pPr>
+            <a:r>
+              <a:rPr sz="1100" b="0">
+                <a:solidFill>
+                  <a:srgbClr val="E8EAF0"/>
+                </a:solidFill>
+                <a:latin typeface="Red Hat Mono"/>
+              </a:rPr>
+              <a:t>\listoftables</a:t>
+            </a:r>
+          </a:p>
+          <a:p>
+            <a:pPr algn="l">
+              <a:spcAft>
+                <a:spcPts val="400"/>
+              </a:spcAft>
+            </a:pPr>
+            <a:r>
+              <a:rPr sz="1100" b="0">
+                <a:solidFill>
+                  <a:srgbClr val="E8EAF0"/>
+                </a:solidFill>
+                <a:latin typeface="Red Hat Mono"/>
+              </a:rPr>
+              <a:t>\chapter  \section</a:t>
+            </a:r>
+          </a:p>
+          <a:p>
+            <a:pPr algn="l">
+              <a:spcAft>
+                <a:spcPts val="400"/>
+              </a:spcAft>
+            </a:pPr>
+            <a:r>
+              <a:rPr sz="1100" b="0">
+                <a:solidFill>
+                  <a:srgbClr val="E8EAF0"/>
+                </a:solidFill>
+                <a:latin typeface="Red Hat Mono"/>
+              </a:rPr>
+              <a:t>figure  table  \caption</a:t>
+            </a:r>
+          </a:p>
+          <a:p>
+            <a:pPr algn="l">
+              <a:spcAft>
+                <a:spcPts val="400"/>
+              </a:spcAft>
+            </a:pPr>
+            <a:r>
+              <a:rPr sz="1100" b="0">
+                <a:solidFill>
+                  <a:srgbClr val="E8EAF0"/>
+                </a:solidFill>
+                <a:latin typeface="Red Hat Mono"/>
+              </a:rPr>
+              <a:t>\input  \include</a:t>
+            </a:r>
+          </a:p>
+          <a:p>
+            <a:pPr algn="l">
+              <a:spcAft>
+                <a:spcPts val="400"/>
+              </a:spcAft>
+            </a:pPr>
+            <a:r>
+              <a:rPr sz="1100" b="0">
+                <a:solidFill>
+                  <a:srgbClr val="E8EAF0"/>
+                </a:solidFill>
+                <a:latin typeface="Red Hat Mono"/>
+              </a:rPr>
+              <a:t>\includegraphics</a:t>
+            </a:r>
+          </a:p>
+          <a:p>
+            <a:pPr algn="l">
+              <a:spcAft>
+                <a:spcPts val="400"/>
+              </a:spcAft>
+            </a:pPr>
+            <a:r>
+              <a:rPr sz="1100" b="0">
+                <a:solidFill>
+                  <a:srgbClr val="E8EAF0"/>
+                </a:solidFill>
+                <a:latin typeface="Red Hat Mono"/>
+              </a:rPr>
+              <a:t>\newcounter  \value</a:t>
+            </a:r>
+          </a:p>
+          <a:p>
+            <a:pPr algn="l">
+              <a:spcAft>
+                <a:spcPts val="400"/>
+              </a:spcAft>
+            </a:pPr>
+            <a:r>
+              <a:rPr sz="1100" b="0">
+                <a:solidFill>
+                  <a:srgbClr val="E8EAF0"/>
+                </a:solidFill>
+                <a:latin typeface="Red Hat Mono"/>
+              </a:rPr>
+              <a:t>\whiledo  \forloop</a:t>
+            </a:r>
+          </a:p>
+          <a:p>
+            <a:pPr algn="l">
+              <a:spcAft>
+                <a:spcPts val="400"/>
+              </a:spcAft>
+            </a:pPr>
+            <a:r>
+              <a:rPr sz="1100" b="0">
+                <a:solidFill>
+                  <a:srgbClr val="E8EAF0"/>
+                </a:solidFill>
+                <a:latin typeface="Red Hat Mono"/>
+              </a:rPr>
+              <a:t>\newpage  \clearpage</a:t>
             </a:r>
           </a:p>
         </p:txBody>
@@ -6487,8 +6686,8 @@
         </p:nvSpPr>
         <p:spPr>
           <a:xfrm>
-            <a:off x="6309360" y="1920240"/>
-            <a:ext cx="5120640" cy="3840480"/>
+            <a:off x="4434840" y="1874519"/>
+            <a:ext cx="3291840" cy="3794760"/>
           </a:xfrm>
           <a:prstGeom prst="roundRect">
             <a:avLst>
@@ -6535,8 +6734,361 @@
         </p:nvSpPr>
         <p:spPr>
           <a:xfrm>
-            <a:off x="6309360" y="1920240"/>
-            <a:ext cx="5120640" cy="73152"/>
+            <a:off x="4434840" y="1874519"/>
+            <a:ext cx="3291840" cy="73152"/>
+          </a:xfrm>
+          <a:prstGeom prst="rect">
+            <a:avLst/>
+          </a:prstGeom>
+          <a:solidFill>
+            <a:srgbClr val="A78BFA"/>
+          </a:solidFill>
+          <a:ln w="12700">
+            <a:solidFill>
+              <a:srgbClr val="A78BFA"/>
+            </a:solidFill>
+          </a:ln>
+          <a:effectLst/>
+        </p:spPr>
+        <p:style>
+          <a:lnRef idx="1">
+            <a:schemeClr val="accent1"/>
+          </a:lnRef>
+          <a:fillRef idx="3">
+            <a:schemeClr val="accent1"/>
+          </a:fillRef>
+          <a:effectRef idx="2">
+            <a:schemeClr val="accent1"/>
+          </a:effectRef>
+          <a:fontRef idx="minor">
+            <a:schemeClr val="lt1"/>
+          </a:fontRef>
+        </p:style>
+        <p:txBody>
+          <a:bodyPr rtlCol="0" anchor="ctr"/>
+          <a:lstStyle/>
+          <a:p>
+            <a:pPr algn="ctr"/>
+          </a:p>
+        </p:txBody>
+      </p:sp>
+      <p:sp>
+        <p:nvSpPr>
+          <p:cNvPr id="14" name="TextBox 13"/>
+          <p:cNvSpPr txBox="1"/>
+          <p:nvPr/>
+        </p:nvSpPr>
+        <p:spPr>
+          <a:xfrm>
+            <a:off x="4617720" y="2057400"/>
+            <a:ext cx="2926080" cy="457200"/>
+          </a:xfrm>
+          <a:prstGeom prst="rect">
+            <a:avLst/>
+          </a:prstGeom>
+          <a:noFill/>
+        </p:spPr>
+        <p:txBody>
+          <a:bodyPr wrap="square" anchor="t" lIns="45720" rIns="45720" tIns="27432" bIns="27432">
+            <a:spAutoFit/>
+          </a:bodyPr>
+          <a:lstStyle/>
+          <a:p>
+            <a:pPr algn="l">
+              <a:spcAft>
+                <a:spcPts val="400"/>
+              </a:spcAft>
+            </a:pPr>
+            <a:r>
+              <a:rPr sz="1800" b="1">
+                <a:solidFill>
+                  <a:srgbClr val="A78BFA"/>
+                </a:solidFill>
+                <a:latin typeface="Montserrat Alternates"/>
+              </a:rPr>
+              <a:t>Packages</a:t>
+            </a:r>
+          </a:p>
+        </p:txBody>
+      </p:sp>
+      <p:sp>
+        <p:nvSpPr>
+          <p:cNvPr id="15" name="TextBox 14"/>
+          <p:cNvSpPr txBox="1"/>
+          <p:nvPr/>
+        </p:nvSpPr>
+        <p:spPr>
+          <a:xfrm>
+            <a:off x="4617720" y="2606040"/>
+            <a:ext cx="2971800" cy="320040"/>
+          </a:xfrm>
+          <a:prstGeom prst="rect">
+            <a:avLst/>
+          </a:prstGeom>
+          <a:noFill/>
+        </p:spPr>
+        <p:txBody>
+          <a:bodyPr wrap="square" anchor="t" lIns="45720" rIns="45720" tIns="27432" bIns="27432">
+            <a:spAutoFit/>
+          </a:bodyPr>
+          <a:lstStyle/>
+          <a:p>
+            <a:pPr algn="l">
+              <a:spcAft>
+                <a:spcPts val="400"/>
+              </a:spcAft>
+            </a:pPr>
+            <a:r>
+              <a:rPr sz="1200" b="1">
+                <a:solidFill>
+                  <a:srgbClr val="8B93A1"/>
+                </a:solidFill>
+                <a:latin typeface="Montserrat Alternates"/>
+              </a:rPr>
+              <a:t>Modeled</a:t>
+            </a:r>
+          </a:p>
+        </p:txBody>
+      </p:sp>
+      <p:sp>
+        <p:nvSpPr>
+          <p:cNvPr id="16" name="TextBox 15"/>
+          <p:cNvSpPr txBox="1"/>
+          <p:nvPr/>
+        </p:nvSpPr>
+        <p:spPr>
+          <a:xfrm>
+            <a:off x="4617720" y="2880360"/>
+            <a:ext cx="2971800" cy="731520"/>
+          </a:xfrm>
+          <a:prstGeom prst="rect">
+            <a:avLst/>
+          </a:prstGeom>
+          <a:noFill/>
+        </p:spPr>
+        <p:txBody>
+          <a:bodyPr wrap="square" anchor="t" lIns="45720" rIns="45720" tIns="27432" bIns="27432">
+            <a:spAutoFit/>
+          </a:bodyPr>
+          <a:lstStyle/>
+          <a:p>
+            <a:pPr algn="l">
+              <a:spcAft>
+                <a:spcPts val="400"/>
+              </a:spcAft>
+            </a:pPr>
+            <a:r>
+              <a:rPr sz="1400" b="0">
+                <a:solidFill>
+                  <a:srgbClr val="E8EAF0"/>
+                </a:solidFill>
+                <a:latin typeface="Red Hat Mono"/>
+              </a:rPr>
+              <a:t>graphicx</a:t>
+            </a:r>
+          </a:p>
+          <a:p>
+            <a:pPr algn="l">
+              <a:spcAft>
+                <a:spcPts val="400"/>
+              </a:spcAft>
+            </a:pPr>
+            <a:r>
+              <a:rPr sz="1400" b="0">
+                <a:solidFill>
+                  <a:srgbClr val="E8EAF0"/>
+                </a:solidFill>
+                <a:latin typeface="Red Hat Mono"/>
+              </a:rPr>
+              <a:t>ifthen</a:t>
+            </a:r>
+          </a:p>
+        </p:txBody>
+      </p:sp>
+      <p:sp>
+        <p:nvSpPr>
+          <p:cNvPr id="17" name="TextBox 16"/>
+          <p:cNvSpPr txBox="1"/>
+          <p:nvPr/>
+        </p:nvSpPr>
+        <p:spPr>
+          <a:xfrm>
+            <a:off x="4617720" y="3611880"/>
+            <a:ext cx="2971800" cy="320040"/>
+          </a:xfrm>
+          <a:prstGeom prst="rect">
+            <a:avLst/>
+          </a:prstGeom>
+          <a:noFill/>
+        </p:spPr>
+        <p:txBody>
+          <a:bodyPr wrap="square" anchor="t" lIns="45720" rIns="45720" tIns="27432" bIns="27432">
+            <a:spAutoFit/>
+          </a:bodyPr>
+          <a:lstStyle/>
+          <a:p>
+            <a:pPr algn="l">
+              <a:spcAft>
+                <a:spcPts val="400"/>
+              </a:spcAft>
+            </a:pPr>
+            <a:r>
+              <a:rPr sz="1200" b="1">
+                <a:solidFill>
+                  <a:srgbClr val="8B93A1"/>
+                </a:solidFill>
+                <a:latin typeface="Montserrat Alternates"/>
+              </a:rPr>
+              <a:t>Accepted as inert</a:t>
+            </a:r>
+          </a:p>
+        </p:txBody>
+      </p:sp>
+      <p:sp>
+        <p:nvSpPr>
+          <p:cNvPr id="18" name="TextBox 17"/>
+          <p:cNvSpPr txBox="1"/>
+          <p:nvPr/>
+        </p:nvSpPr>
+        <p:spPr>
+          <a:xfrm>
+            <a:off x="4617720" y="3886200"/>
+            <a:ext cx="2971800" cy="1737360"/>
+          </a:xfrm>
+          <a:prstGeom prst="rect">
+            <a:avLst/>
+          </a:prstGeom>
+          <a:noFill/>
+        </p:spPr>
+        <p:txBody>
+          <a:bodyPr wrap="square" anchor="t" lIns="45720" rIns="45720" tIns="27432" bIns="27432">
+            <a:spAutoFit/>
+          </a:bodyPr>
+          <a:lstStyle/>
+          <a:p>
+            <a:pPr algn="l">
+              <a:spcAft>
+                <a:spcPts val="400"/>
+              </a:spcAft>
+            </a:pPr>
+            <a:r>
+              <a:rPr sz="1300" b="0">
+                <a:solidFill>
+                  <a:srgbClr val="E8EAF0"/>
+                </a:solidFill>
+                <a:latin typeface="Red Hat Mono"/>
+              </a:rPr>
+              <a:t>inputenc  fontenc  ae</a:t>
+            </a:r>
+          </a:p>
+          <a:p>
+            <a:pPr algn="l">
+              <a:spcAft>
+                <a:spcPts val="400"/>
+              </a:spcAft>
+            </a:pPr>
+            <a:r>
+              <a:rPr sz="1300" b="0">
+                <a:solidFill>
+                  <a:srgbClr val="E8EAF0"/>
+                </a:solidFill>
+                <a:latin typeface="Red Hat Mono"/>
+              </a:rPr>
+              <a:t>aecompl  lmodern</a:t>
+            </a:r>
+          </a:p>
+          <a:p>
+            <a:pPr algn="l">
+              <a:spcAft>
+                <a:spcPts val="400"/>
+              </a:spcAft>
+            </a:pPr>
+            <a:r>
+              <a:rPr sz="1300" b="0">
+                <a:solidFill>
+                  <a:srgbClr val="E8EAF0"/>
+                </a:solidFill>
+                <a:latin typeface="Red Hat Mono"/>
+              </a:rPr>
+              <a:t>xcolor  parskip  geometry</a:t>
+            </a:r>
+          </a:p>
+          <a:p>
+            <a:pPr algn="l">
+              <a:spcAft>
+                <a:spcPts val="400"/>
+              </a:spcAft>
+            </a:pPr>
+            <a:r>
+              <a:rPr sz="1300" b="0">
+                <a:solidFill>
+                  <a:srgbClr val="E8EAF0"/>
+                </a:solidFill>
+                <a:latin typeface="Red Hat Mono"/>
+              </a:rPr>
+              <a:t>setspace  multicol  amsmath</a:t>
+            </a:r>
+          </a:p>
+        </p:txBody>
+      </p:sp>
+      <p:sp>
+        <p:nvSpPr>
+          <p:cNvPr id="19" name="Rounded Rectangle 18"/>
+          <p:cNvSpPr/>
+          <p:nvPr/>
+        </p:nvSpPr>
+        <p:spPr>
+          <a:xfrm>
+            <a:off x="8046720" y="1874519"/>
+            <a:ext cx="3291840" cy="3794760"/>
+          </a:xfrm>
+          <a:prstGeom prst="roundRect">
+            <a:avLst>
+              <a:gd name="adj" fmla="val 10000"/>
+            </a:avLst>
+          </a:prstGeom>
+          <a:solidFill>
+            <a:srgbClr val="171A21"/>
+          </a:solidFill>
+          <a:ln w="12700">
+            <a:solidFill>
+              <a:srgbClr val="2A2F3A"/>
+            </a:solidFill>
+          </a:ln>
+          <a:effectLst/>
+        </p:spPr>
+        <p:style>
+          <a:lnRef idx="1">
+            <a:schemeClr val="accent1"/>
+          </a:lnRef>
+          <a:fillRef idx="3">
+            <a:schemeClr val="accent1"/>
+          </a:fillRef>
+          <a:effectRef idx="2">
+            <a:schemeClr val="accent1"/>
+          </a:effectRef>
+          <a:fontRef idx="minor">
+            <a:schemeClr val="lt1"/>
+          </a:fontRef>
+        </p:style>
+        <p:txBody>
+          <a:bodyPr rtlCol="0" anchor="ctr"/>
+          <a:lstStyle/>
+          <a:p>
+            <a:pPr algn="ctr"/>
+          </a:p>
+        </p:txBody>
+      </p:sp>
+      <p:sp>
+        <p:nvSpPr>
+          <p:cNvPr id="20" name="Rectangle 19"/>
+          <p:cNvSpPr/>
+          <p:nvPr/>
+        </p:nvSpPr>
+        <p:spPr>
+          <a:xfrm>
+            <a:off x="8046720" y="1874519"/>
+            <a:ext cx="3291840" cy="73152"/>
           </a:xfrm>
           <a:prstGeom prst="rect">
             <a:avLst/>
@@ -6575,14 +7127,14 @@
       </p:sp>
       <p:sp>
         <p:nvSpPr>
-          <p:cNvPr id="14" name="TextBox 13"/>
+          <p:cNvPr id="21" name="TextBox 20"/>
           <p:cNvSpPr txBox="1"/>
           <p:nvPr/>
         </p:nvSpPr>
         <p:spPr>
           <a:xfrm>
-            <a:off x="6583680" y="2148840"/>
-            <a:ext cx="4572000" cy="457200"/>
+            <a:off x="8229600" y="2057400"/>
+            <a:ext cx="2926080" cy="457200"/>
           </a:xfrm>
           <a:prstGeom prst="rect">
             <a:avLst/>
@@ -6601,27 +7153,27 @@
               </a:spcAft>
             </a:pPr>
             <a:r>
-              <a:rPr sz="2000" b="1">
+              <a:rPr sz="1800" b="1">
                 <a:solidFill>
                   <a:srgbClr val="FBBF24"/>
                 </a:solidFill>
                 <a:latin typeface="Montserrat Alternates"/>
               </a:rPr>
-              <a:t>Limits</a:t>
-            </a:r>
-          </a:p>
-        </p:txBody>
-      </p:sp>
-      <p:sp>
-        <p:nvSpPr>
-          <p:cNvPr id="15" name="TextBox 14"/>
+              <a:t>Classes and tools</a:t>
+            </a:r>
+          </a:p>
+        </p:txBody>
+      </p:sp>
+      <p:sp>
+        <p:nvSpPr>
+          <p:cNvPr id="22" name="TextBox 21"/>
           <p:cNvSpPr txBox="1"/>
           <p:nvPr/>
         </p:nvSpPr>
         <p:spPr>
           <a:xfrm>
-            <a:off x="6583680" y="2788920"/>
-            <a:ext cx="4572000" cy="2926080"/>
+            <a:off x="8229600" y="2606040"/>
+            <a:ext cx="2971800" cy="3017520"/>
           </a:xfrm>
           <a:prstGeom prst="rect">
             <a:avLst/>
@@ -6640,109 +7192,148 @@
               </a:spcAft>
             </a:pPr>
             <a:r>
+              <a:rPr sz="1400" b="0">
+                <a:solidFill>
+                  <a:srgbClr val="E8EAF0"/>
+                </a:solidFill>
+                <a:latin typeface="Red Hat Mono"/>
+              </a:rPr>
+              <a:t>article</a:t>
+            </a:r>
+          </a:p>
+          <a:p>
+            <a:pPr algn="l">
+              <a:spcAft>
+                <a:spcPts val="400"/>
+              </a:spcAft>
+            </a:pPr>
+            <a:r>
+              <a:rPr sz="1400" b="0">
+                <a:solidFill>
+                  <a:srgbClr val="E8EAF0"/>
+                </a:solidFill>
+                <a:latin typeface="Red Hat Mono"/>
+              </a:rPr>
+              <a:t>report</a:t>
+            </a:r>
+          </a:p>
+          <a:p>
+            <a:pPr algn="l">
+              <a:spcAft>
+                <a:spcPts val="400"/>
+              </a:spcAft>
+            </a:pPr>
+            <a:r>
+              <a:rPr sz="1400" b="0">
+                <a:solidFill>
+                  <a:srgbClr val="E8EAF0"/>
+                </a:solidFill>
+                <a:latin typeface="Red Hat Mono"/>
+              </a:rPr>
+              <a:t>book</a:t>
+            </a:r>
+          </a:p>
+          <a:p>
+            <a:pPr algn="l">
+              <a:spcAft>
+                <a:spcPts val="400"/>
+              </a:spcAft>
+            </a:pPr>
+            <a:r>
+              <a:rPr sz="1400" b="0">
+                <a:solidFill>
+                  <a:srgbClr val="E8EAF0"/>
+                </a:solidFill>
+                <a:latin typeface="Red Hat Mono"/>
+              </a:rPr>
+              <a:t/>
+            </a:r>
+          </a:p>
+          <a:p>
+            <a:pPr algn="l">
+              <a:spcAft>
+                <a:spcPts val="400"/>
+              </a:spcAft>
+            </a:pPr>
+            <a:r>
+              <a:rPr sz="1400" b="0">
+                <a:solidFill>
+                  <a:srgbClr val="E8EAF0"/>
+                </a:solidFill>
+                <a:latin typeface="Red Hat Mono"/>
+              </a:rPr>
+              <a:t>BibTeX for citations</a:t>
+            </a:r>
+          </a:p>
+          <a:p>
+            <a:pPr algn="l">
+              <a:spcAft>
+                <a:spcPts val="400"/>
+              </a:spcAft>
+            </a:pPr>
+            <a:r>
+              <a:rPr sz="1400" b="0">
+                <a:solidFill>
+                  <a:srgbClr val="E8EAF0"/>
+                </a:solidFill>
+                <a:latin typeface="Red Hat Mono"/>
+              </a:rPr>
+              <a:t/>
+            </a:r>
+          </a:p>
+          <a:p>
+            <a:pPr algn="l">
+              <a:spcAft>
+                <a:spcPts val="400"/>
+              </a:spcAft>
+            </a:pPr>
+            <a:r>
+              <a:rPr sz="1400" b="0">
+                <a:solidFill>
+                  <a:srgbClr val="E8EAF0"/>
+                </a:solidFill>
+                <a:latin typeface="Red Hat Mono"/>
+              </a:rPr>
+              <a:t>Other classes: see limits</a:t>
+            </a:r>
+          </a:p>
+        </p:txBody>
+      </p:sp>
+      <p:sp>
+        <p:nvSpPr>
+          <p:cNvPr id="23" name="TextBox 22"/>
+          <p:cNvSpPr txBox="1"/>
+          <p:nvPr/>
+        </p:nvSpPr>
+        <p:spPr>
+          <a:xfrm>
+            <a:off x="822960" y="5760720"/>
+            <a:ext cx="10607040" cy="457200"/>
+          </a:xfrm>
+          <a:prstGeom prst="rect">
+            <a:avLst/>
+          </a:prstGeom>
+          <a:noFill/>
+        </p:spPr>
+        <p:txBody>
+          <a:bodyPr wrap="square" anchor="t" lIns="45720" rIns="45720" tIns="27432" bIns="27432">
+            <a:spAutoFit/>
+          </a:bodyPr>
+          <a:lstStyle/>
+          <a:p>
+            <a:pPr algn="l">
+              <a:spcAft>
+                <a:spcPts val="400"/>
+              </a:spcAft>
+            </a:pPr>
+            <a:r>
               <a:rPr sz="1500" b="0">
                 <a:solidFill>
-                  <a:srgbClr val="E8EAF0"/>
+                  <a:srgbClr val="8B93A1"/>
                 </a:solidFill>
                 <a:latin typeface="Red Hat Display"/>
               </a:rPr>
-              <a:t>Works on a declared LaTeX subset. Other packages give UNKNOWN.</a:t>
-            </a:r>
-          </a:p>
-          <a:p>
-            <a:pPr algn="l">
-              <a:spcAft>
-                <a:spcPts val="400"/>
-              </a:spcAft>
-            </a:pPr>
-            <a:r>
-              <a:rPr sz="1500" b="0">
-                <a:solidFill>
-                  <a:srgbClr val="E8EAF0"/>
-                </a:solidFill>
-                <a:latin typeface="Red Hat Display"/>
-              </a:rPr>
-              <a:t/>
-            </a:r>
-          </a:p>
-          <a:p>
-            <a:pPr algn="l">
-              <a:spcAft>
-                <a:spcPts val="400"/>
-              </a:spcAft>
-            </a:pPr>
-            <a:r>
-              <a:rPr sz="1500" b="0">
-                <a:solidFill>
-                  <a:srgbClr val="E8EAF0"/>
-                </a:solidFill>
-                <a:latin typeface="Red Hat Display"/>
-              </a:rPr>
-              <a:t>Line-width, float and varioref feedback are not modeled.</a:t>
-            </a:r>
-          </a:p>
-          <a:p>
-            <a:pPr algn="l">
-              <a:spcAft>
-                <a:spcPts val="400"/>
-              </a:spcAft>
-            </a:pPr>
-            <a:r>
-              <a:rPr sz="1500" b="0">
-                <a:solidFill>
-                  <a:srgbClr val="E8EAF0"/>
-                </a:solidFill>
-                <a:latin typeface="Red Hat Display"/>
-              </a:rPr>
-              <a:t/>
-            </a:r>
-          </a:p>
-          <a:p>
-            <a:pPr algn="l">
-              <a:spcAft>
-                <a:spcPts val="400"/>
-              </a:spcAft>
-            </a:pPr>
-            <a:r>
-              <a:rPr sz="1500" b="0">
-                <a:solidFill>
-                  <a:srgbClr val="E8EAF0"/>
-                </a:solidFill>
-                <a:latin typeface="Red Hat Display"/>
-              </a:rPr>
-              <a:t>The corpus has 15 documents, mostly synthetic.</a:t>
-            </a:r>
-          </a:p>
-          <a:p>
-            <a:pPr algn="l">
-              <a:spcAft>
-                <a:spcPts val="400"/>
-              </a:spcAft>
-            </a:pPr>
-            <a:r>
-              <a:rPr sz="1500" b="0">
-                <a:solidFill>
-                  <a:srgbClr val="E8EAF0"/>
-                </a:solidFill>
-                <a:latin typeface="Red Hat Display"/>
-              </a:rPr>
-              <a:t/>
-            </a:r>
-          </a:p>
-          <a:p>
-            <a:pPr algn="l">
-              <a:spcAft>
-                <a:spcPts val="400"/>
-              </a:spcAft>
-            </a:pPr>
-            <a:r>
-              <a:rPr sz="1500" b="0">
-                <a:solidFill>
-                  <a:srgbClr val="E8EAF0"/>
-                </a:solidFill>
-                <a:latin typeface="Red Hat Display"/>
-              </a:rPr>
-              <a:t>The model assumes that resolving a reference never alters pagination.</a:t>
+              <a:t>Inert means no analysis effect. The package name is accepted, but its layout effects are not modeled.</a:t>
             </a:r>
           </a:p>
         </p:txBody>
@@ -6801,7 +7392,7 @@
                 </a:solidFill>
                 <a:latin typeface="Montserrat Alternates"/>
               </a:rPr>
-              <a:t>Where it helps</a:t>
+              <a:t>What it cannot handle yet</a:t>
             </a:r>
           </a:p>
         </p:txBody>
@@ -6886,7 +7477,7 @@
                 </a:solidFill>
                 <a:latin typeface="Montserrat Alternates"/>
               </a:rPr>
-              <a:t>USE CASES</a:t>
+              <a:t>LIMITATIONS</a:t>
             </a:r>
           </a:p>
         </p:txBody>
@@ -7023,8 +7614,8 @@
         </p:nvSpPr>
         <p:spPr>
           <a:xfrm>
-            <a:off x="822960" y="2103120"/>
-            <a:ext cx="2468880" cy="3017520"/>
+            <a:off x="822960" y="1874519"/>
+            <a:ext cx="3291840" cy="3474720"/>
           </a:xfrm>
           <a:prstGeom prst="roundRect">
             <a:avLst>
@@ -7071,18 +7662,18 @@
         </p:nvSpPr>
         <p:spPr>
           <a:xfrm>
-            <a:off x="822960" y="2103120"/>
-            <a:ext cx="2468880" cy="73152"/>
+            <a:off x="822960" y="1874519"/>
+            <a:ext cx="3291840" cy="73152"/>
           </a:xfrm>
           <a:prstGeom prst="rect">
             <a:avLst/>
           </a:prstGeom>
           <a:solidFill>
-            <a:srgbClr val="A78BFA"/>
+            <a:srgbClr val="FBBF24"/>
           </a:solidFill>
           <a:ln w="12700">
             <a:solidFill>
-              <a:srgbClr val="A78BFA"/>
+              <a:srgbClr val="FBBF24"/>
             </a:solidFill>
           </a:ln>
           <a:effectLst/>
@@ -7117,8 +7708,8 @@
         </p:nvSpPr>
         <p:spPr>
           <a:xfrm>
-            <a:off x="960120" y="2423160"/>
-            <a:ext cx="2194560" cy="731520"/>
+            <a:off x="1005840" y="2057400"/>
+            <a:ext cx="2926080" cy="457200"/>
           </a:xfrm>
           <a:prstGeom prst="rect">
             <a:avLst/>
@@ -7131,19 +7722,19 @@
           </a:bodyPr>
           <a:lstStyle/>
           <a:p>
-            <a:pPr algn="ctr">
-              <a:spcAft>
-                <a:spcPts val="400"/>
-              </a:spcAft>
-            </a:pPr>
-            <a:r>
-              <a:rPr sz="1900" b="1">
-                <a:solidFill>
-                  <a:srgbClr val="E8EAF0"/>
+            <a:pPr algn="l">
+              <a:spcAft>
+                <a:spcPts val="400"/>
+              </a:spcAft>
+            </a:pPr>
+            <a:r>
+              <a:rPr sz="1700" b="1">
+                <a:solidFill>
+                  <a:srgbClr val="FBBF24"/>
                 </a:solidFill>
                 <a:latin typeface="Montserrat Alternates"/>
               </a:rPr>
-              <a:t>Reference checks</a:t>
+              <a:t>Unsupported</a:t>
             </a:r>
           </a:p>
         </p:txBody>
@@ -7156,8 +7747,8 @@
         </p:nvSpPr>
         <p:spPr>
           <a:xfrm>
-            <a:off x="1005840" y="3200400"/>
-            <a:ext cx="2103120" cy="1188720"/>
+            <a:off x="1005840" y="2651760"/>
+            <a:ext cx="2971800" cy="2651760"/>
           </a:xfrm>
           <a:prstGeom prst="rect">
             <a:avLst/>
@@ -7170,72 +7761,129 @@
           </a:bodyPr>
           <a:lstStyle/>
           <a:p>
-            <a:pPr algn="ctr">
-              <a:spcAft>
-                <a:spcPts val="400"/>
-              </a:spcAft>
-            </a:pPr>
-            <a:r>
-              <a:rPr sz="1500" b="0">
-                <a:solidFill>
-                  <a:srgbClr val="8B93A1"/>
+            <a:pPr algn="l">
+              <a:spcAft>
+                <a:spcPts val="400"/>
+              </a:spcAft>
+            </a:pPr>
+            <a:r>
+              <a:rPr sz="1300" b="0">
+                <a:solidFill>
+                  <a:srgbClr val="E8EAF0"/>
                 </a:solidFill>
                 <a:latin typeface="Red Hat Display"/>
               </a:rPr>
-              <a:t>Find undefined labels and missing citations in CI.</a:t>
-            </a:r>
-          </a:p>
-        </p:txBody>
-      </p:sp>
-      <p:sp>
-        <p:nvSpPr>
-          <p:cNvPr id="12" name="TextBox 11"/>
-          <p:cNvSpPr txBox="1"/>
-          <p:nvPr/>
-        </p:nvSpPr>
-        <p:spPr>
-          <a:xfrm>
-            <a:off x="914400" y="4434840"/>
-            <a:ext cx="2286000" cy="457200"/>
-          </a:xfrm>
-          <a:prstGeom prst="rect">
-            <a:avLst/>
-          </a:prstGeom>
-          <a:noFill/>
-        </p:spPr>
-        <p:txBody>
-          <a:bodyPr wrap="square" anchor="t" lIns="45720" rIns="45720" tIns="27432" bIns="27432">
-            <a:spAutoFit/>
-          </a:bodyPr>
-          <a:lstStyle/>
-          <a:p>
-            <a:pPr algn="ctr">
-              <a:spcAft>
-                <a:spcPts val="400"/>
-              </a:spcAft>
-            </a:pPr>
-            <a:r>
-              <a:rPr sz="1200" b="0">
-                <a:solidFill>
-                  <a:srgbClr val="A78BFA"/>
-                </a:solidFill>
-                <a:latin typeface="Red Hat Mono"/>
-              </a:rPr>
-              <a:t>auxflow check --json</a:t>
-            </a:r>
-          </a:p>
-        </p:txBody>
-      </p:sp>
-      <p:sp>
-        <p:nvSpPr>
-          <p:cNvPr id="13" name="Rounded Rectangle 12"/>
+              <a:t>Gives UNKNOWN:</a:t>
+            </a:r>
+          </a:p>
+          <a:p>
+            <a:pPr algn="l">
+              <a:spcAft>
+                <a:spcPts val="400"/>
+              </a:spcAft>
+            </a:pPr>
+            <a:r>
+              <a:rPr sz="1300" b="0">
+                <a:solidFill>
+                  <a:srgbClr val="E8EAF0"/>
+                </a:solidFill>
+                <a:latin typeface="Red Hat Display"/>
+              </a:rPr>
+              <a:t>Any other package: biblatex, tikz, fancyhdr, tabularx</a:t>
+            </a:r>
+          </a:p>
+          <a:p>
+            <a:pPr algn="l">
+              <a:spcAft>
+                <a:spcPts val="400"/>
+              </a:spcAft>
+            </a:pPr>
+            <a:r>
+              <a:rPr sz="1300" b="0">
+                <a:solidFill>
+                  <a:srgbClr val="E8EAF0"/>
+                </a:solidFill>
+                <a:latin typeface="Red Hat Display"/>
+              </a:rPr>
+              <a:t>A local .cls file</a:t>
+            </a:r>
+          </a:p>
+          <a:p>
+            <a:pPr algn="l">
+              <a:spcAft>
+                <a:spcPts val="400"/>
+              </a:spcAft>
+            </a:pPr>
+            <a:r>
+              <a:rPr sz="1300" b="0">
+                <a:solidFill>
+                  <a:srgbClr val="E8EAF0"/>
+                </a:solidFill>
+                <a:latin typeface="Red Hat Display"/>
+              </a:rPr>
+              <a:t>varioref commands</a:t>
+            </a:r>
+          </a:p>
+          <a:p>
+            <a:pPr algn="l">
+              <a:spcAft>
+                <a:spcPts val="400"/>
+              </a:spcAft>
+            </a:pPr>
+            <a:r>
+              <a:rPr sz="1300" b="0">
+                <a:solidFill>
+                  <a:srgbClr val="E8EAF0"/>
+                </a:solidFill>
+                <a:latin typeface="Red Hat Display"/>
+              </a:rPr>
+              <a:t>Page references under roman or alph numbering</a:t>
+            </a:r>
+          </a:p>
+          <a:p>
+            <a:pPr algn="l">
+              <a:spcAft>
+                <a:spcPts val="400"/>
+              </a:spcAft>
+            </a:pPr>
+            <a:r>
+              <a:rPr sz="1300" b="0">
+                <a:solidFill>
+                  <a:srgbClr val="E8EAF0"/>
+                </a:solidFill>
+                <a:latin typeface="Red Hat Display"/>
+              </a:rPr>
+              <a:t>\csname, \expandafter, catcode changes, shell escape</a:t>
+            </a:r>
+          </a:p>
+          <a:p>
+            <a:pPr algn="l">
+              <a:spcAft>
+                <a:spcPts val="400"/>
+              </a:spcAft>
+            </a:pPr>
+            <a:r>
+              <a:rPr sz="1300" b="0">
+                <a:solidFill>
+                  <a:srgbClr val="E8EAF0"/>
+                </a:solidFill>
+                <a:latin typeface="Red Hat Display"/>
+              </a:rPr>
+              <a:t>lstlisting</a:t>
+            </a:r>
+          </a:p>
+        </p:txBody>
+      </p:sp>
+      <p:sp>
+        <p:nvSpPr>
+          <p:cNvPr id="12" name="Rounded Rectangle 11"/>
           <p:cNvSpPr/>
           <p:nvPr/>
         </p:nvSpPr>
         <p:spPr>
           <a:xfrm>
-            <a:off x="3520440" y="2103120"/>
-            <a:ext cx="2468880" cy="3017520"/>
+            <a:off x="4434840" y="1874519"/>
+            <a:ext cx="3291840" cy="3474720"/>
           </a:xfrm>
           <a:prstGeom prst="roundRect">
             <a:avLst>
@@ -7276,24 +7924,24 @@
       </p:sp>
       <p:sp>
         <p:nvSpPr>
-          <p:cNvPr id="14" name="Rectangle 13"/>
+          <p:cNvPr id="13" name="Rectangle 12"/>
           <p:cNvSpPr/>
           <p:nvPr/>
         </p:nvSpPr>
         <p:spPr>
           <a:xfrm>
-            <a:off x="3520440" y="2103120"/>
-            <a:ext cx="2468880" cy="73152"/>
+            <a:off x="4434840" y="1874519"/>
+            <a:ext cx="3291840" cy="73152"/>
           </a:xfrm>
           <a:prstGeom prst="rect">
             <a:avLst/>
           </a:prstGeom>
           <a:solidFill>
-            <a:srgbClr val="A78BFA"/>
+            <a:srgbClr val="F87171"/>
           </a:solidFill>
           <a:ln w="12700">
             <a:solidFill>
-              <a:srgbClr val="A78BFA"/>
+              <a:srgbClr val="F87171"/>
             </a:solidFill>
           </a:ln>
           <a:effectLst/>
@@ -7322,14 +7970,14 @@
       </p:sp>
       <p:sp>
         <p:nvSpPr>
-          <p:cNvPr id="15" name="TextBox 14"/>
+          <p:cNvPr id="14" name="TextBox 13"/>
           <p:cNvSpPr txBox="1"/>
           <p:nvPr/>
         </p:nvSpPr>
         <p:spPr>
           <a:xfrm>
-            <a:off x="3657600" y="2423160"/>
-            <a:ext cx="2194560" cy="731520"/>
+            <a:off x="4617720" y="2057400"/>
+            <a:ext cx="2926080" cy="457200"/>
           </a:xfrm>
           <a:prstGeom prst="rect">
             <a:avLst/>
@@ -7342,33 +7990,33 @@
           </a:bodyPr>
           <a:lstStyle/>
           <a:p>
-            <a:pPr algn="ctr">
-              <a:spcAft>
-                <a:spcPts val="400"/>
-              </a:spcAft>
-            </a:pPr>
-            <a:r>
-              <a:rPr sz="1900" b="1">
-                <a:solidFill>
-                  <a:srgbClr val="E8EAF0"/>
+            <a:pPr algn="l">
+              <a:spcAft>
+                <a:spcPts val="400"/>
+              </a:spcAft>
+            </a:pPr>
+            <a:r>
+              <a:rPr sz="1700" b="1">
+                <a:solidFill>
+                  <a:srgbClr val="F87171"/>
                 </a:solidFill>
                 <a:latin typeface="Montserrat Alternates"/>
               </a:rPr>
-              <a:t>Editor feedback</a:t>
-            </a:r>
-          </a:p>
-        </p:txBody>
-      </p:sp>
-      <p:sp>
-        <p:nvSpPr>
-          <p:cNvPr id="16" name="TextBox 15"/>
+              <a:t>Outside the model</a:t>
+            </a:r>
+          </a:p>
+        </p:txBody>
+      </p:sp>
+      <p:sp>
+        <p:nvSpPr>
+          <p:cNvPr id="15" name="TextBox 14"/>
           <p:cNvSpPr txBox="1"/>
           <p:nvPr/>
         </p:nvSpPr>
         <p:spPr>
           <a:xfrm>
-            <a:off x="3703320" y="3200400"/>
-            <a:ext cx="2103120" cy="1188720"/>
+            <a:off x="4617720" y="2651760"/>
+            <a:ext cx="2971800" cy="2651760"/>
           </a:xfrm>
           <a:prstGeom prst="rect">
             <a:avLst/>
@@ -7381,72 +8029,97 @@
           </a:bodyPr>
           <a:lstStyle/>
           <a:p>
-            <a:pPr algn="ctr">
-              <a:spcAft>
-                <a:spcPts val="400"/>
-              </a:spcAft>
-            </a:pPr>
-            <a:r>
-              <a:rPr sz="1500" b="0">
-                <a:solidFill>
-                  <a:srgbClr val="8B93A1"/>
+            <a:pPr algn="l">
+              <a:spcAft>
+                <a:spcPts val="400"/>
+              </a:spcAft>
+            </a:pPr>
+            <a:r>
+              <a:rPr sz="1300" b="0">
+                <a:solidFill>
+                  <a:srgbClr val="E8EAF0"/>
                 </a:solidFill>
                 <a:latin typeface="Red Hat Display"/>
               </a:rPr>
-              <a:t>See warnings and the state while you write.</a:t>
-            </a:r>
-          </a:p>
-        </p:txBody>
-      </p:sp>
-      <p:sp>
-        <p:nvSpPr>
-          <p:cNvPr id="17" name="TextBox 16"/>
-          <p:cNvSpPr txBox="1"/>
-          <p:nvPr/>
-        </p:nvSpPr>
-        <p:spPr>
-          <a:xfrm>
-            <a:off x="3611880" y="4434840"/>
-            <a:ext cx="2286000" cy="457200"/>
-          </a:xfrm>
-          <a:prstGeom prst="rect">
-            <a:avLst/>
-          </a:prstGeom>
-          <a:noFill/>
-        </p:spPr>
-        <p:txBody>
-          <a:bodyPr wrap="square" anchor="t" lIns="45720" rIns="45720" tIns="27432" bIns="27432">
-            <a:spAutoFit/>
-          </a:bodyPr>
-          <a:lstStyle/>
-          <a:p>
-            <a:pPr algn="ctr">
-              <a:spcAft>
-                <a:spcPts val="400"/>
-              </a:spcAft>
-            </a:pPr>
-            <a:r>
-              <a:rPr sz="1200" b="0">
-                <a:solidFill>
-                  <a:srgbClr val="A78BFA"/>
-                </a:solidFill>
-                <a:latin typeface="Red Hat Mono"/>
-              </a:rPr>
-              <a:t>VS Code extension</a:t>
-            </a:r>
-          </a:p>
-        </p:txBody>
-      </p:sp>
-      <p:sp>
-        <p:nvSpPr>
-          <p:cNvPr id="18" name="Rounded Rectangle 17"/>
+              <a:t>Line breaking and text width</a:t>
+            </a:r>
+          </a:p>
+          <a:p>
+            <a:pPr algn="l">
+              <a:spcAft>
+                <a:spcPts val="400"/>
+              </a:spcAft>
+            </a:pPr>
+            <a:r>
+              <a:rPr sz="1300" b="0">
+                <a:solidFill>
+                  <a:srgbClr val="E8EAF0"/>
+                </a:solidFill>
+                <a:latin typeface="Red Hat Display"/>
+              </a:rPr>
+              <a:t>Float placement</a:t>
+            </a:r>
+          </a:p>
+          <a:p>
+            <a:pPr algn="l">
+              <a:spcAft>
+                <a:spcPts val="400"/>
+              </a:spcAft>
+            </a:pPr>
+            <a:r>
+              <a:rPr sz="1300" b="0">
+                <a:solidFill>
+                  <a:srgbClr val="E8EAF0"/>
+                </a:solidFill>
+                <a:latin typeface="Red Hat Display"/>
+              </a:rPr>
+              <a:t>Footnote extent</a:t>
+            </a:r>
+          </a:p>
+          <a:p>
+            <a:pPr algn="l">
+              <a:spcAft>
+                <a:spcPts val="400"/>
+              </a:spcAft>
+            </a:pPr>
+            <a:r>
+              <a:rPr sz="1300" b="0">
+                <a:solidFill>
+                  <a:srgbClr val="E8EAF0"/>
+                </a:solidFill>
+                <a:latin typeface="Red Hat Display"/>
+              </a:rPr>
+              <a:t>Nondeterministic output such as random values</a:t>
+            </a:r>
+          </a:p>
+          <a:p>
+            <a:pPr algn="l">
+              <a:spcAft>
+                <a:spcPts val="400"/>
+              </a:spcAft>
+            </a:pPr>
+            <a:r>
+              <a:rPr sz="1300" b="0">
+                <a:solidFill>
+                  <a:srgbClr val="E8EAF0"/>
+                </a:solidFill>
+                <a:latin typeface="Red Hat Display"/>
+              </a:rPr>
+              <a:t>Macro bodies: recorded, never expanded</a:t>
+            </a:r>
+          </a:p>
+        </p:txBody>
+      </p:sp>
+      <p:sp>
+        <p:nvSpPr>
+          <p:cNvPr id="16" name="Rounded Rectangle 15"/>
           <p:cNvSpPr/>
           <p:nvPr/>
         </p:nvSpPr>
         <p:spPr>
           <a:xfrm>
-            <a:off x="6217920" y="2103120"/>
-            <a:ext cx="2468880" cy="3017520"/>
+            <a:off x="8046720" y="1874519"/>
+            <a:ext cx="3291840" cy="3474720"/>
           </a:xfrm>
           <a:prstGeom prst="roundRect">
             <a:avLst>
@@ -7487,24 +8160,24 @@
       </p:sp>
       <p:sp>
         <p:nvSpPr>
-          <p:cNvPr id="19" name="Rectangle 18"/>
+          <p:cNvPr id="17" name="Rectangle 16"/>
           <p:cNvSpPr/>
           <p:nvPr/>
         </p:nvSpPr>
         <p:spPr>
           <a:xfrm>
-            <a:off x="6217920" y="2103120"/>
-            <a:ext cx="2468880" cy="73152"/>
+            <a:off x="8046720" y="1874519"/>
+            <a:ext cx="3291840" cy="73152"/>
           </a:xfrm>
           <a:prstGeom prst="rect">
             <a:avLst/>
           </a:prstGeom>
           <a:solidFill>
-            <a:srgbClr val="A78BFA"/>
+            <a:srgbClr val="CBD2DC"/>
           </a:solidFill>
           <a:ln w="12700">
             <a:solidFill>
-              <a:srgbClr val="A78BFA"/>
+              <a:srgbClr val="CBD2DC"/>
             </a:solidFill>
           </a:ln>
           <a:effectLst/>
@@ -7533,14 +8206,14 @@
       </p:sp>
       <p:sp>
         <p:nvSpPr>
-          <p:cNvPr id="20" name="TextBox 19"/>
+          <p:cNvPr id="18" name="TextBox 17"/>
           <p:cNvSpPr txBox="1"/>
           <p:nvPr/>
         </p:nvSpPr>
         <p:spPr>
           <a:xfrm>
-            <a:off x="6355080" y="2423160"/>
-            <a:ext cx="2194560" cy="731520"/>
+            <a:off x="8229600" y="2057400"/>
+            <a:ext cx="2926080" cy="457200"/>
           </a:xfrm>
           <a:prstGeom prst="rect">
             <a:avLst/>
@@ -7553,33 +8226,33 @@
           </a:bodyPr>
           <a:lstStyle/>
           <a:p>
-            <a:pPr algn="ctr">
-              <a:spcAft>
-                <a:spcPts val="400"/>
-              </a:spcAft>
-            </a:pPr>
-            <a:r>
-              <a:rPr sz="1900" b="1">
-                <a:solidFill>
-                  <a:srgbClr val="E8EAF0"/>
+            <a:pPr algn="l">
+              <a:spcAft>
+                <a:spcPts val="400"/>
+              </a:spcAft>
+            </a:pPr>
+            <a:r>
+              <a:rPr sz="1700" b="1">
+                <a:solidFill>
+                  <a:srgbClr val="CBD2DC"/>
                 </a:solidFill>
                 <a:latin typeface="Montserrat Alternates"/>
               </a:rPr>
-              <a:t>Long documents</a:t>
-            </a:r>
-          </a:p>
-        </p:txBody>
-      </p:sp>
-      <p:sp>
-        <p:nvSpPr>
-          <p:cNvPr id="21" name="TextBox 20"/>
+              <a:t>Design limits</a:t>
+            </a:r>
+          </a:p>
+        </p:txBody>
+      </p:sp>
+      <p:sp>
+        <p:nvSpPr>
+          <p:cNvPr id="19" name="TextBox 18"/>
           <p:cNvSpPr txBox="1"/>
           <p:nvPr/>
         </p:nvSpPr>
         <p:spPr>
           <a:xfrm>
-            <a:off x="6400800" y="3200400"/>
-            <a:ext cx="2103120" cy="1188720"/>
+            <a:off x="8229600" y="2651760"/>
+            <a:ext cx="2971800" cy="2651760"/>
           </a:xfrm>
           <a:prstGeom prst="rect">
             <a:avLst/>
@@ -7592,72 +8265,81 @@
           </a:bodyPr>
           <a:lstStyle/>
           <a:p>
-            <a:pPr algn="ctr">
-              <a:spcAft>
-                <a:spcPts val="400"/>
-              </a:spcAft>
-            </a:pPr>
-            <a:r>
-              <a:rPr sz="1500" b="0">
-                <a:solidFill>
-                  <a:srgbClr val="8B93A1"/>
+            <a:pPr algn="l">
+              <a:spcAft>
+                <a:spcPts val="400"/>
+              </a:spcAft>
+            </a:pPr>
+            <a:r>
+              <a:rPr sz="1300" b="0">
+                <a:solidFill>
+                  <a:srgbClr val="E8EAF0"/>
                 </a:solidFill>
                 <a:latin typeface="Red Hat Display"/>
               </a:rPr>
-              <a:t>Plan the runs for a thesis with contents and a bibliography.</a:t>
-            </a:r>
-          </a:p>
-        </p:txBody>
-      </p:sp>
-      <p:sp>
-        <p:nvSpPr>
-          <p:cNvPr id="22" name="TextBox 21"/>
-          <p:cNvSpPr txBox="1"/>
-          <p:nvPr/>
-        </p:nvSpPr>
-        <p:spPr>
-          <a:xfrm>
-            <a:off x="6309360" y="4434840"/>
-            <a:ext cx="2286000" cy="457200"/>
-          </a:xfrm>
-          <a:prstGeom prst="rect">
-            <a:avLst/>
-          </a:prstGeom>
-          <a:noFill/>
-        </p:spPr>
-        <p:txBody>
-          <a:bodyPr wrap="square" anchor="t" lIns="45720" rIns="45720" tIns="27432" bIns="27432">
-            <a:spAutoFit/>
-          </a:bodyPr>
-          <a:lstStyle/>
-          <a:p>
-            <a:pPr algn="ctr">
-              <a:spcAft>
-                <a:spcPts val="400"/>
-              </a:spcAft>
-            </a:pPr>
-            <a:r>
-              <a:rPr sz="1200" b="0">
-                <a:solidFill>
-                  <a:srgbClr val="A78BFA"/>
-                </a:solidFill>
-                <a:latin typeface="Red Hat Mono"/>
-              </a:rPr>
-              <a:t>auxflow plan --explain</a:t>
-            </a:r>
-          </a:p>
-        </p:txBody>
-      </p:sp>
-      <p:sp>
-        <p:nvSpPr>
-          <p:cNvPr id="23" name="Rounded Rectangle 22"/>
+              <a:t>One opaque construct downgrades the whole document</a:t>
+            </a:r>
+          </a:p>
+          <a:p>
+            <a:pPr algn="l">
+              <a:spcAft>
+                <a:spcPts val="400"/>
+              </a:spcAft>
+            </a:pPr>
+            <a:r>
+              <a:rPr sz="1300" b="0">
+                <a:solidFill>
+                  <a:srgbClr val="E8EAF0"/>
+                </a:solidFill>
+                <a:latin typeface="Red Hat Display"/>
+              </a:rPr>
+              <a:t>The pass count is a bound, not a minimum</a:t>
+            </a:r>
+          </a:p>
+          <a:p>
+            <a:pPr algn="l">
+              <a:spcAft>
+                <a:spcPts val="400"/>
+              </a:spcAft>
+            </a:pPr>
+            <a:r>
+              <a:rPr sz="1300" b="0">
+                <a:solidFill>
+                  <a:srgbClr val="E8EAF0"/>
+                </a:solidFill>
+                <a:latin typeface="Red Hat Display"/>
+              </a:rPr>
+              <a:t>Assumes resolving a reference does not alter pagination</a:t>
+            </a:r>
+          </a:p>
+          <a:p>
+            <a:pPr algn="l">
+              <a:spcAft>
+                <a:spcPts val="400"/>
+              </a:spcAft>
+            </a:pPr>
+            <a:r>
+              <a:rPr sz="1300" b="0">
+                <a:solidFill>
+                  <a:srgbClr val="E8EAF0"/>
+                </a:solidFill>
+                <a:latin typeface="Red Hat Display"/>
+              </a:rPr>
+              <a:t>15 documents, mostly synthetic</a:t>
+            </a:r>
+          </a:p>
+        </p:txBody>
+      </p:sp>
+      <p:sp>
+        <p:nvSpPr>
+          <p:cNvPr id="20" name="Rounded Rectangle 19"/>
           <p:cNvSpPr/>
           <p:nvPr/>
         </p:nvSpPr>
         <p:spPr>
           <a:xfrm>
-            <a:off x="8915400" y="2103120"/>
-            <a:ext cx="2468880" cy="3017520"/>
+            <a:off x="822960" y="5486400"/>
+            <a:ext cx="10607040" cy="640080"/>
           </a:xfrm>
           <a:prstGeom prst="roundRect">
             <a:avLst>
@@ -7669,7 +8351,7 @@
           </a:solidFill>
           <a:ln w="12700">
             <a:solidFill>
-              <a:srgbClr val="2A2F3A"/>
+              <a:srgbClr val="34D399"/>
             </a:solidFill>
           </a:ln>
           <a:effectLst/>
@@ -7698,60 +8380,14 @@
       </p:sp>
       <p:sp>
         <p:nvSpPr>
-          <p:cNvPr id="24" name="Rectangle 23"/>
-          <p:cNvSpPr/>
-          <p:nvPr/>
-        </p:nvSpPr>
-        <p:spPr>
-          <a:xfrm>
-            <a:off x="8915400" y="2103120"/>
-            <a:ext cx="2468880" cy="73152"/>
-          </a:xfrm>
-          <a:prstGeom prst="rect">
-            <a:avLst/>
-          </a:prstGeom>
-          <a:solidFill>
-            <a:srgbClr val="A78BFA"/>
-          </a:solidFill>
-          <a:ln w="12700">
-            <a:solidFill>
-              <a:srgbClr val="A78BFA"/>
-            </a:solidFill>
-          </a:ln>
-          <a:effectLst/>
-        </p:spPr>
-        <p:style>
-          <a:lnRef idx="1">
-            <a:schemeClr val="accent1"/>
-          </a:lnRef>
-          <a:fillRef idx="3">
-            <a:schemeClr val="accent1"/>
-          </a:fillRef>
-          <a:effectRef idx="2">
-            <a:schemeClr val="accent1"/>
-          </a:effectRef>
-          <a:fontRef idx="minor">
-            <a:schemeClr val="lt1"/>
-          </a:fontRef>
-        </p:style>
-        <p:txBody>
-          <a:bodyPr rtlCol="0" anchor="ctr"/>
-          <a:lstStyle/>
-          <a:p>
-            <a:pPr algn="ctr"/>
-          </a:p>
-        </p:txBody>
-      </p:sp>
-      <p:sp>
-        <p:nvSpPr>
-          <p:cNvPr id="25" name="TextBox 24"/>
+          <p:cNvPr id="21" name="TextBox 20"/>
           <p:cNvSpPr txBox="1"/>
           <p:nvPr/>
         </p:nvSpPr>
         <p:spPr>
           <a:xfrm>
-            <a:off x="9052560" y="2423160"/>
-            <a:ext cx="2194560" cy="731520"/>
+            <a:off x="822960" y="5486400"/>
+            <a:ext cx="10607040" cy="640080"/>
           </a:xfrm>
           <a:prstGeom prst="rect">
             <a:avLst/>
@@ -7759,7 +8395,7 @@
           <a:noFill/>
         </p:spPr>
         <p:txBody>
-          <a:bodyPr wrap="square" anchor="t" lIns="45720" rIns="45720" tIns="27432" bIns="27432">
+          <a:bodyPr wrap="square" anchor="ctr" lIns="45720" rIns="45720" tIns="27432" bIns="27432">
             <a:spAutoFit/>
           </a:bodyPr>
           <a:lstStyle/>
@@ -7770,130 +8406,13 @@
               </a:spcAft>
             </a:pPr>
             <a:r>
-              <a:rPr sz="1900" b="1">
-                <a:solidFill>
-                  <a:srgbClr val="E8EAF0"/>
+              <a:rPr sz="1600" b="1">
+                <a:solidFill>
+                  <a:srgbClr val="34D399"/>
                 </a:solidFill>
                 <a:latin typeface="Montserrat Alternates"/>
               </a:rPr>
-              <a:t>Runaway builds</a:t>
-            </a:r>
-          </a:p>
-        </p:txBody>
-      </p:sp>
-      <p:sp>
-        <p:nvSpPr>
-          <p:cNvPr id="26" name="TextBox 25"/>
-          <p:cNvSpPr txBox="1"/>
-          <p:nvPr/>
-        </p:nvSpPr>
-        <p:spPr>
-          <a:xfrm>
-            <a:off x="9098280" y="3200400"/>
-            <a:ext cx="2103120" cy="1188720"/>
-          </a:xfrm>
-          <a:prstGeom prst="rect">
-            <a:avLst/>
-          </a:prstGeom>
-          <a:noFill/>
-        </p:spPr>
-        <p:txBody>
-          <a:bodyPr wrap="square" anchor="t" lIns="45720" rIns="45720" tIns="27432" bIns="27432">
-            <a:spAutoFit/>
-          </a:bodyPr>
-          <a:lstStyle/>
-          <a:p>
-            <a:pPr algn="ctr">
-              <a:spcAft>
-                <a:spcPts val="400"/>
-              </a:spcAft>
-            </a:pPr>
-            <a:r>
-              <a:rPr sz="1500" b="0">
-                <a:solidFill>
-                  <a:srgbClr val="8B93A1"/>
-                </a:solidFill>
-                <a:latin typeface="Red Hat Display"/>
-              </a:rPr>
-              <a:t>Refuse a document that never settles before it burns runs.</a:t>
-            </a:r>
-          </a:p>
-        </p:txBody>
-      </p:sp>
-      <p:sp>
-        <p:nvSpPr>
-          <p:cNvPr id="27" name="TextBox 26"/>
-          <p:cNvSpPr txBox="1"/>
-          <p:nvPr/>
-        </p:nvSpPr>
-        <p:spPr>
-          <a:xfrm>
-            <a:off x="9006840" y="4434840"/>
-            <a:ext cx="2286000" cy="457200"/>
-          </a:xfrm>
-          <a:prstGeom prst="rect">
-            <a:avLst/>
-          </a:prstGeom>
-          <a:noFill/>
-        </p:spPr>
-        <p:txBody>
-          <a:bodyPr wrap="square" anchor="t" lIns="45720" rIns="45720" tIns="27432" bIns="27432">
-            <a:spAutoFit/>
-          </a:bodyPr>
-          <a:lstStyle/>
-          <a:p>
-            <a:pPr algn="ctr">
-              <a:spcAft>
-                <a:spcPts val="400"/>
-              </a:spcAft>
-            </a:pPr>
-            <a:r>
-              <a:rPr sz="1200" b="0">
-                <a:solidFill>
-                  <a:srgbClr val="A78BFA"/>
-                </a:solidFill>
-                <a:latin typeface="Red Hat Mono"/>
-              </a:rPr>
-              <a:t>auxflow classify</a:t>
-            </a:r>
-          </a:p>
-        </p:txBody>
-      </p:sp>
-      <p:sp>
-        <p:nvSpPr>
-          <p:cNvPr id="28" name="TextBox 27"/>
-          <p:cNvSpPr txBox="1"/>
-          <p:nvPr/>
-        </p:nvSpPr>
-        <p:spPr>
-          <a:xfrm>
-            <a:off x="822960" y="5440680"/>
-            <a:ext cx="10515600" cy="548640"/>
-          </a:xfrm>
-          <a:prstGeom prst="rect">
-            <a:avLst/>
-          </a:prstGeom>
-          <a:noFill/>
-        </p:spPr>
-        <p:txBody>
-          <a:bodyPr wrap="square" anchor="t" lIns="45720" rIns="45720" tIns="27432" bIns="27432">
-            <a:spAutoFit/>
-          </a:bodyPr>
-          <a:lstStyle/>
-          <a:p>
-            <a:pPr algn="l">
-              <a:spcAft>
-                <a:spcPts val="400"/>
-              </a:spcAft>
-            </a:pPr>
-            <a:r>
-              <a:rPr sz="1800" b="0">
-                <a:solidFill>
-                  <a:srgbClr val="8B93A1"/>
-                </a:solidFill>
-                <a:latin typeface="Red Hat Display"/>
-              </a:rPr>
-              <a:t>pip install auxflow. Python 3.12 or newer, no runtime dependencies, MIT license.</a:t>
+              <a:t>UNKNOWN is safe: at least three runs, checked by runtime. It does not mean the document fails.</a:t>
             </a:r>
           </a:p>
         </p:txBody>
@@ -7952,7 +8471,7 @@
                 </a:solidFill>
                 <a:latin typeface="Montserrat Alternates"/>
               </a:rPr>
-              <a:t>Questions you may have</a:t>
+              <a:t>Where it helps</a:t>
             </a:r>
           </a:p>
         </p:txBody>
@@ -8037,7 +8556,7 @@
                 </a:solidFill>
                 <a:latin typeface="Montserrat Alternates"/>
               </a:rPr>
-              <a:t>FAQ</a:t>
+              <a:t>USE CASES</a:t>
             </a:r>
           </a:p>
         </p:txBody>
@@ -8162,6 +8681,1157 @@
                 <a:latin typeface="Red Hat Display"/>
               </a:rPr>
               <a:t>13</a:t>
+            </a:r>
+          </a:p>
+        </p:txBody>
+      </p:sp>
+      <p:sp>
+        <p:nvSpPr>
+          <p:cNvPr id="8" name="Rounded Rectangle 7"/>
+          <p:cNvSpPr/>
+          <p:nvPr/>
+        </p:nvSpPr>
+        <p:spPr>
+          <a:xfrm>
+            <a:off x="822960" y="2103120"/>
+            <a:ext cx="2468880" cy="3017520"/>
+          </a:xfrm>
+          <a:prstGeom prst="roundRect">
+            <a:avLst>
+              <a:gd name="adj" fmla="val 10000"/>
+            </a:avLst>
+          </a:prstGeom>
+          <a:solidFill>
+            <a:srgbClr val="171A21"/>
+          </a:solidFill>
+          <a:ln w="12700">
+            <a:solidFill>
+              <a:srgbClr val="2A2F3A"/>
+            </a:solidFill>
+          </a:ln>
+          <a:effectLst/>
+        </p:spPr>
+        <p:style>
+          <a:lnRef idx="1">
+            <a:schemeClr val="accent1"/>
+          </a:lnRef>
+          <a:fillRef idx="3">
+            <a:schemeClr val="accent1"/>
+          </a:fillRef>
+          <a:effectRef idx="2">
+            <a:schemeClr val="accent1"/>
+          </a:effectRef>
+          <a:fontRef idx="minor">
+            <a:schemeClr val="lt1"/>
+          </a:fontRef>
+        </p:style>
+        <p:txBody>
+          <a:bodyPr rtlCol="0" anchor="ctr"/>
+          <a:lstStyle/>
+          <a:p>
+            <a:pPr algn="ctr"/>
+          </a:p>
+        </p:txBody>
+      </p:sp>
+      <p:sp>
+        <p:nvSpPr>
+          <p:cNvPr id="9" name="Rectangle 8"/>
+          <p:cNvSpPr/>
+          <p:nvPr/>
+        </p:nvSpPr>
+        <p:spPr>
+          <a:xfrm>
+            <a:off x="822960" y="2103120"/>
+            <a:ext cx="2468880" cy="73152"/>
+          </a:xfrm>
+          <a:prstGeom prst="rect">
+            <a:avLst/>
+          </a:prstGeom>
+          <a:solidFill>
+            <a:srgbClr val="A78BFA"/>
+          </a:solidFill>
+          <a:ln w="12700">
+            <a:solidFill>
+              <a:srgbClr val="A78BFA"/>
+            </a:solidFill>
+          </a:ln>
+          <a:effectLst/>
+        </p:spPr>
+        <p:style>
+          <a:lnRef idx="1">
+            <a:schemeClr val="accent1"/>
+          </a:lnRef>
+          <a:fillRef idx="3">
+            <a:schemeClr val="accent1"/>
+          </a:fillRef>
+          <a:effectRef idx="2">
+            <a:schemeClr val="accent1"/>
+          </a:effectRef>
+          <a:fontRef idx="minor">
+            <a:schemeClr val="lt1"/>
+          </a:fontRef>
+        </p:style>
+        <p:txBody>
+          <a:bodyPr rtlCol="0" anchor="ctr"/>
+          <a:lstStyle/>
+          <a:p>
+            <a:pPr algn="ctr"/>
+          </a:p>
+        </p:txBody>
+      </p:sp>
+      <p:sp>
+        <p:nvSpPr>
+          <p:cNvPr id="10" name="TextBox 9"/>
+          <p:cNvSpPr txBox="1"/>
+          <p:nvPr/>
+        </p:nvSpPr>
+        <p:spPr>
+          <a:xfrm>
+            <a:off x="960120" y="2423160"/>
+            <a:ext cx="2194560" cy="731520"/>
+          </a:xfrm>
+          <a:prstGeom prst="rect">
+            <a:avLst/>
+          </a:prstGeom>
+          <a:noFill/>
+        </p:spPr>
+        <p:txBody>
+          <a:bodyPr wrap="square" anchor="t" lIns="45720" rIns="45720" tIns="27432" bIns="27432">
+            <a:spAutoFit/>
+          </a:bodyPr>
+          <a:lstStyle/>
+          <a:p>
+            <a:pPr algn="ctr">
+              <a:spcAft>
+                <a:spcPts val="400"/>
+              </a:spcAft>
+            </a:pPr>
+            <a:r>
+              <a:rPr sz="1900" b="1">
+                <a:solidFill>
+                  <a:srgbClr val="E8EAF0"/>
+                </a:solidFill>
+                <a:latin typeface="Montserrat Alternates"/>
+              </a:rPr>
+              <a:t>Reference checks</a:t>
+            </a:r>
+          </a:p>
+        </p:txBody>
+      </p:sp>
+      <p:sp>
+        <p:nvSpPr>
+          <p:cNvPr id="11" name="TextBox 10"/>
+          <p:cNvSpPr txBox="1"/>
+          <p:nvPr/>
+        </p:nvSpPr>
+        <p:spPr>
+          <a:xfrm>
+            <a:off x="1005840" y="3200400"/>
+            <a:ext cx="2103120" cy="1188720"/>
+          </a:xfrm>
+          <a:prstGeom prst="rect">
+            <a:avLst/>
+          </a:prstGeom>
+          <a:noFill/>
+        </p:spPr>
+        <p:txBody>
+          <a:bodyPr wrap="square" anchor="t" lIns="45720" rIns="45720" tIns="27432" bIns="27432">
+            <a:spAutoFit/>
+          </a:bodyPr>
+          <a:lstStyle/>
+          <a:p>
+            <a:pPr algn="ctr">
+              <a:spcAft>
+                <a:spcPts val="400"/>
+              </a:spcAft>
+            </a:pPr>
+            <a:r>
+              <a:rPr sz="1500" b="0">
+                <a:solidFill>
+                  <a:srgbClr val="8B93A1"/>
+                </a:solidFill>
+                <a:latin typeface="Red Hat Display"/>
+              </a:rPr>
+              <a:t>Find undefined labels and missing citations in CI.</a:t>
+            </a:r>
+          </a:p>
+        </p:txBody>
+      </p:sp>
+      <p:sp>
+        <p:nvSpPr>
+          <p:cNvPr id="12" name="TextBox 11"/>
+          <p:cNvSpPr txBox="1"/>
+          <p:nvPr/>
+        </p:nvSpPr>
+        <p:spPr>
+          <a:xfrm>
+            <a:off x="914400" y="4434840"/>
+            <a:ext cx="2286000" cy="457200"/>
+          </a:xfrm>
+          <a:prstGeom prst="rect">
+            <a:avLst/>
+          </a:prstGeom>
+          <a:noFill/>
+        </p:spPr>
+        <p:txBody>
+          <a:bodyPr wrap="square" anchor="t" lIns="45720" rIns="45720" tIns="27432" bIns="27432">
+            <a:spAutoFit/>
+          </a:bodyPr>
+          <a:lstStyle/>
+          <a:p>
+            <a:pPr algn="ctr">
+              <a:spcAft>
+                <a:spcPts val="400"/>
+              </a:spcAft>
+            </a:pPr>
+            <a:r>
+              <a:rPr sz="1200" b="0">
+                <a:solidFill>
+                  <a:srgbClr val="A78BFA"/>
+                </a:solidFill>
+                <a:latin typeface="Red Hat Mono"/>
+              </a:rPr>
+              <a:t>auxflow check --json</a:t>
+            </a:r>
+          </a:p>
+        </p:txBody>
+      </p:sp>
+      <p:sp>
+        <p:nvSpPr>
+          <p:cNvPr id="13" name="Rounded Rectangle 12"/>
+          <p:cNvSpPr/>
+          <p:nvPr/>
+        </p:nvSpPr>
+        <p:spPr>
+          <a:xfrm>
+            <a:off x="3520440" y="2103120"/>
+            <a:ext cx="2468880" cy="3017520"/>
+          </a:xfrm>
+          <a:prstGeom prst="roundRect">
+            <a:avLst>
+              <a:gd name="adj" fmla="val 10000"/>
+            </a:avLst>
+          </a:prstGeom>
+          <a:solidFill>
+            <a:srgbClr val="171A21"/>
+          </a:solidFill>
+          <a:ln w="12700">
+            <a:solidFill>
+              <a:srgbClr val="2A2F3A"/>
+            </a:solidFill>
+          </a:ln>
+          <a:effectLst/>
+        </p:spPr>
+        <p:style>
+          <a:lnRef idx="1">
+            <a:schemeClr val="accent1"/>
+          </a:lnRef>
+          <a:fillRef idx="3">
+            <a:schemeClr val="accent1"/>
+          </a:fillRef>
+          <a:effectRef idx="2">
+            <a:schemeClr val="accent1"/>
+          </a:effectRef>
+          <a:fontRef idx="minor">
+            <a:schemeClr val="lt1"/>
+          </a:fontRef>
+        </p:style>
+        <p:txBody>
+          <a:bodyPr rtlCol="0" anchor="ctr"/>
+          <a:lstStyle/>
+          <a:p>
+            <a:pPr algn="ctr"/>
+          </a:p>
+        </p:txBody>
+      </p:sp>
+      <p:sp>
+        <p:nvSpPr>
+          <p:cNvPr id="14" name="Rectangle 13"/>
+          <p:cNvSpPr/>
+          <p:nvPr/>
+        </p:nvSpPr>
+        <p:spPr>
+          <a:xfrm>
+            <a:off x="3520440" y="2103120"/>
+            <a:ext cx="2468880" cy="73152"/>
+          </a:xfrm>
+          <a:prstGeom prst="rect">
+            <a:avLst/>
+          </a:prstGeom>
+          <a:solidFill>
+            <a:srgbClr val="A78BFA"/>
+          </a:solidFill>
+          <a:ln w="12700">
+            <a:solidFill>
+              <a:srgbClr val="A78BFA"/>
+            </a:solidFill>
+          </a:ln>
+          <a:effectLst/>
+        </p:spPr>
+        <p:style>
+          <a:lnRef idx="1">
+            <a:schemeClr val="accent1"/>
+          </a:lnRef>
+          <a:fillRef idx="3">
+            <a:schemeClr val="accent1"/>
+          </a:fillRef>
+          <a:effectRef idx="2">
+            <a:schemeClr val="accent1"/>
+          </a:effectRef>
+          <a:fontRef idx="minor">
+            <a:schemeClr val="lt1"/>
+          </a:fontRef>
+        </p:style>
+        <p:txBody>
+          <a:bodyPr rtlCol="0" anchor="ctr"/>
+          <a:lstStyle/>
+          <a:p>
+            <a:pPr algn="ctr"/>
+          </a:p>
+        </p:txBody>
+      </p:sp>
+      <p:sp>
+        <p:nvSpPr>
+          <p:cNvPr id="15" name="TextBox 14"/>
+          <p:cNvSpPr txBox="1"/>
+          <p:nvPr/>
+        </p:nvSpPr>
+        <p:spPr>
+          <a:xfrm>
+            <a:off x="3657600" y="2423160"/>
+            <a:ext cx="2194560" cy="731520"/>
+          </a:xfrm>
+          <a:prstGeom prst="rect">
+            <a:avLst/>
+          </a:prstGeom>
+          <a:noFill/>
+        </p:spPr>
+        <p:txBody>
+          <a:bodyPr wrap="square" anchor="t" lIns="45720" rIns="45720" tIns="27432" bIns="27432">
+            <a:spAutoFit/>
+          </a:bodyPr>
+          <a:lstStyle/>
+          <a:p>
+            <a:pPr algn="ctr">
+              <a:spcAft>
+                <a:spcPts val="400"/>
+              </a:spcAft>
+            </a:pPr>
+            <a:r>
+              <a:rPr sz="1900" b="1">
+                <a:solidFill>
+                  <a:srgbClr val="E8EAF0"/>
+                </a:solidFill>
+                <a:latin typeface="Montserrat Alternates"/>
+              </a:rPr>
+              <a:t>Editor feedback</a:t>
+            </a:r>
+          </a:p>
+        </p:txBody>
+      </p:sp>
+      <p:sp>
+        <p:nvSpPr>
+          <p:cNvPr id="16" name="TextBox 15"/>
+          <p:cNvSpPr txBox="1"/>
+          <p:nvPr/>
+        </p:nvSpPr>
+        <p:spPr>
+          <a:xfrm>
+            <a:off x="3703320" y="3200400"/>
+            <a:ext cx="2103120" cy="1188720"/>
+          </a:xfrm>
+          <a:prstGeom prst="rect">
+            <a:avLst/>
+          </a:prstGeom>
+          <a:noFill/>
+        </p:spPr>
+        <p:txBody>
+          <a:bodyPr wrap="square" anchor="t" lIns="45720" rIns="45720" tIns="27432" bIns="27432">
+            <a:spAutoFit/>
+          </a:bodyPr>
+          <a:lstStyle/>
+          <a:p>
+            <a:pPr algn="ctr">
+              <a:spcAft>
+                <a:spcPts val="400"/>
+              </a:spcAft>
+            </a:pPr>
+            <a:r>
+              <a:rPr sz="1500" b="0">
+                <a:solidFill>
+                  <a:srgbClr val="8B93A1"/>
+                </a:solidFill>
+                <a:latin typeface="Red Hat Display"/>
+              </a:rPr>
+              <a:t>See warnings and the state while you write.</a:t>
+            </a:r>
+          </a:p>
+        </p:txBody>
+      </p:sp>
+      <p:sp>
+        <p:nvSpPr>
+          <p:cNvPr id="17" name="TextBox 16"/>
+          <p:cNvSpPr txBox="1"/>
+          <p:nvPr/>
+        </p:nvSpPr>
+        <p:spPr>
+          <a:xfrm>
+            <a:off x="3611880" y="4434840"/>
+            <a:ext cx="2286000" cy="457200"/>
+          </a:xfrm>
+          <a:prstGeom prst="rect">
+            <a:avLst/>
+          </a:prstGeom>
+          <a:noFill/>
+        </p:spPr>
+        <p:txBody>
+          <a:bodyPr wrap="square" anchor="t" lIns="45720" rIns="45720" tIns="27432" bIns="27432">
+            <a:spAutoFit/>
+          </a:bodyPr>
+          <a:lstStyle/>
+          <a:p>
+            <a:pPr algn="ctr">
+              <a:spcAft>
+                <a:spcPts val="400"/>
+              </a:spcAft>
+            </a:pPr>
+            <a:r>
+              <a:rPr sz="1200" b="0">
+                <a:solidFill>
+                  <a:srgbClr val="A78BFA"/>
+                </a:solidFill>
+                <a:latin typeface="Red Hat Mono"/>
+              </a:rPr>
+              <a:t>VS Code extension</a:t>
+            </a:r>
+          </a:p>
+        </p:txBody>
+      </p:sp>
+      <p:sp>
+        <p:nvSpPr>
+          <p:cNvPr id="18" name="Rounded Rectangle 17"/>
+          <p:cNvSpPr/>
+          <p:nvPr/>
+        </p:nvSpPr>
+        <p:spPr>
+          <a:xfrm>
+            <a:off x="6217920" y="2103120"/>
+            <a:ext cx="2468880" cy="3017520"/>
+          </a:xfrm>
+          <a:prstGeom prst="roundRect">
+            <a:avLst>
+              <a:gd name="adj" fmla="val 10000"/>
+            </a:avLst>
+          </a:prstGeom>
+          <a:solidFill>
+            <a:srgbClr val="171A21"/>
+          </a:solidFill>
+          <a:ln w="12700">
+            <a:solidFill>
+              <a:srgbClr val="2A2F3A"/>
+            </a:solidFill>
+          </a:ln>
+          <a:effectLst/>
+        </p:spPr>
+        <p:style>
+          <a:lnRef idx="1">
+            <a:schemeClr val="accent1"/>
+          </a:lnRef>
+          <a:fillRef idx="3">
+            <a:schemeClr val="accent1"/>
+          </a:fillRef>
+          <a:effectRef idx="2">
+            <a:schemeClr val="accent1"/>
+          </a:effectRef>
+          <a:fontRef idx="minor">
+            <a:schemeClr val="lt1"/>
+          </a:fontRef>
+        </p:style>
+        <p:txBody>
+          <a:bodyPr rtlCol="0" anchor="ctr"/>
+          <a:lstStyle/>
+          <a:p>
+            <a:pPr algn="ctr"/>
+          </a:p>
+        </p:txBody>
+      </p:sp>
+      <p:sp>
+        <p:nvSpPr>
+          <p:cNvPr id="19" name="Rectangle 18"/>
+          <p:cNvSpPr/>
+          <p:nvPr/>
+        </p:nvSpPr>
+        <p:spPr>
+          <a:xfrm>
+            <a:off x="6217920" y="2103120"/>
+            <a:ext cx="2468880" cy="73152"/>
+          </a:xfrm>
+          <a:prstGeom prst="rect">
+            <a:avLst/>
+          </a:prstGeom>
+          <a:solidFill>
+            <a:srgbClr val="A78BFA"/>
+          </a:solidFill>
+          <a:ln w="12700">
+            <a:solidFill>
+              <a:srgbClr val="A78BFA"/>
+            </a:solidFill>
+          </a:ln>
+          <a:effectLst/>
+        </p:spPr>
+        <p:style>
+          <a:lnRef idx="1">
+            <a:schemeClr val="accent1"/>
+          </a:lnRef>
+          <a:fillRef idx="3">
+            <a:schemeClr val="accent1"/>
+          </a:fillRef>
+          <a:effectRef idx="2">
+            <a:schemeClr val="accent1"/>
+          </a:effectRef>
+          <a:fontRef idx="minor">
+            <a:schemeClr val="lt1"/>
+          </a:fontRef>
+        </p:style>
+        <p:txBody>
+          <a:bodyPr rtlCol="0" anchor="ctr"/>
+          <a:lstStyle/>
+          <a:p>
+            <a:pPr algn="ctr"/>
+          </a:p>
+        </p:txBody>
+      </p:sp>
+      <p:sp>
+        <p:nvSpPr>
+          <p:cNvPr id="20" name="TextBox 19"/>
+          <p:cNvSpPr txBox="1"/>
+          <p:nvPr/>
+        </p:nvSpPr>
+        <p:spPr>
+          <a:xfrm>
+            <a:off x="6355080" y="2423160"/>
+            <a:ext cx="2194560" cy="731520"/>
+          </a:xfrm>
+          <a:prstGeom prst="rect">
+            <a:avLst/>
+          </a:prstGeom>
+          <a:noFill/>
+        </p:spPr>
+        <p:txBody>
+          <a:bodyPr wrap="square" anchor="t" lIns="45720" rIns="45720" tIns="27432" bIns="27432">
+            <a:spAutoFit/>
+          </a:bodyPr>
+          <a:lstStyle/>
+          <a:p>
+            <a:pPr algn="ctr">
+              <a:spcAft>
+                <a:spcPts val="400"/>
+              </a:spcAft>
+            </a:pPr>
+            <a:r>
+              <a:rPr sz="1900" b="1">
+                <a:solidFill>
+                  <a:srgbClr val="E8EAF0"/>
+                </a:solidFill>
+                <a:latin typeface="Montserrat Alternates"/>
+              </a:rPr>
+              <a:t>Long documents</a:t>
+            </a:r>
+          </a:p>
+        </p:txBody>
+      </p:sp>
+      <p:sp>
+        <p:nvSpPr>
+          <p:cNvPr id="21" name="TextBox 20"/>
+          <p:cNvSpPr txBox="1"/>
+          <p:nvPr/>
+        </p:nvSpPr>
+        <p:spPr>
+          <a:xfrm>
+            <a:off x="6400800" y="3200400"/>
+            <a:ext cx="2103120" cy="1188720"/>
+          </a:xfrm>
+          <a:prstGeom prst="rect">
+            <a:avLst/>
+          </a:prstGeom>
+          <a:noFill/>
+        </p:spPr>
+        <p:txBody>
+          <a:bodyPr wrap="square" anchor="t" lIns="45720" rIns="45720" tIns="27432" bIns="27432">
+            <a:spAutoFit/>
+          </a:bodyPr>
+          <a:lstStyle/>
+          <a:p>
+            <a:pPr algn="ctr">
+              <a:spcAft>
+                <a:spcPts val="400"/>
+              </a:spcAft>
+            </a:pPr>
+            <a:r>
+              <a:rPr sz="1500" b="0">
+                <a:solidFill>
+                  <a:srgbClr val="8B93A1"/>
+                </a:solidFill>
+                <a:latin typeface="Red Hat Display"/>
+              </a:rPr>
+              <a:t>Plan the runs for a thesis with contents and a bibliography.</a:t>
+            </a:r>
+          </a:p>
+        </p:txBody>
+      </p:sp>
+      <p:sp>
+        <p:nvSpPr>
+          <p:cNvPr id="22" name="TextBox 21"/>
+          <p:cNvSpPr txBox="1"/>
+          <p:nvPr/>
+        </p:nvSpPr>
+        <p:spPr>
+          <a:xfrm>
+            <a:off x="6309360" y="4434840"/>
+            <a:ext cx="2286000" cy="457200"/>
+          </a:xfrm>
+          <a:prstGeom prst="rect">
+            <a:avLst/>
+          </a:prstGeom>
+          <a:noFill/>
+        </p:spPr>
+        <p:txBody>
+          <a:bodyPr wrap="square" anchor="t" lIns="45720" rIns="45720" tIns="27432" bIns="27432">
+            <a:spAutoFit/>
+          </a:bodyPr>
+          <a:lstStyle/>
+          <a:p>
+            <a:pPr algn="ctr">
+              <a:spcAft>
+                <a:spcPts val="400"/>
+              </a:spcAft>
+            </a:pPr>
+            <a:r>
+              <a:rPr sz="1200" b="0">
+                <a:solidFill>
+                  <a:srgbClr val="A78BFA"/>
+                </a:solidFill>
+                <a:latin typeface="Red Hat Mono"/>
+              </a:rPr>
+              <a:t>auxflow plan --explain</a:t>
+            </a:r>
+          </a:p>
+        </p:txBody>
+      </p:sp>
+      <p:sp>
+        <p:nvSpPr>
+          <p:cNvPr id="23" name="Rounded Rectangle 22"/>
+          <p:cNvSpPr/>
+          <p:nvPr/>
+        </p:nvSpPr>
+        <p:spPr>
+          <a:xfrm>
+            <a:off x="8915400" y="2103120"/>
+            <a:ext cx="2468880" cy="3017520"/>
+          </a:xfrm>
+          <a:prstGeom prst="roundRect">
+            <a:avLst>
+              <a:gd name="adj" fmla="val 10000"/>
+            </a:avLst>
+          </a:prstGeom>
+          <a:solidFill>
+            <a:srgbClr val="171A21"/>
+          </a:solidFill>
+          <a:ln w="12700">
+            <a:solidFill>
+              <a:srgbClr val="2A2F3A"/>
+            </a:solidFill>
+          </a:ln>
+          <a:effectLst/>
+        </p:spPr>
+        <p:style>
+          <a:lnRef idx="1">
+            <a:schemeClr val="accent1"/>
+          </a:lnRef>
+          <a:fillRef idx="3">
+            <a:schemeClr val="accent1"/>
+          </a:fillRef>
+          <a:effectRef idx="2">
+            <a:schemeClr val="accent1"/>
+          </a:effectRef>
+          <a:fontRef idx="minor">
+            <a:schemeClr val="lt1"/>
+          </a:fontRef>
+        </p:style>
+        <p:txBody>
+          <a:bodyPr rtlCol="0" anchor="ctr"/>
+          <a:lstStyle/>
+          <a:p>
+            <a:pPr algn="ctr"/>
+          </a:p>
+        </p:txBody>
+      </p:sp>
+      <p:sp>
+        <p:nvSpPr>
+          <p:cNvPr id="24" name="Rectangle 23"/>
+          <p:cNvSpPr/>
+          <p:nvPr/>
+        </p:nvSpPr>
+        <p:spPr>
+          <a:xfrm>
+            <a:off x="8915400" y="2103120"/>
+            <a:ext cx="2468880" cy="73152"/>
+          </a:xfrm>
+          <a:prstGeom prst="rect">
+            <a:avLst/>
+          </a:prstGeom>
+          <a:solidFill>
+            <a:srgbClr val="A78BFA"/>
+          </a:solidFill>
+          <a:ln w="12700">
+            <a:solidFill>
+              <a:srgbClr val="A78BFA"/>
+            </a:solidFill>
+          </a:ln>
+          <a:effectLst/>
+        </p:spPr>
+        <p:style>
+          <a:lnRef idx="1">
+            <a:schemeClr val="accent1"/>
+          </a:lnRef>
+          <a:fillRef idx="3">
+            <a:schemeClr val="accent1"/>
+          </a:fillRef>
+          <a:effectRef idx="2">
+            <a:schemeClr val="accent1"/>
+          </a:effectRef>
+          <a:fontRef idx="minor">
+            <a:schemeClr val="lt1"/>
+          </a:fontRef>
+        </p:style>
+        <p:txBody>
+          <a:bodyPr rtlCol="0" anchor="ctr"/>
+          <a:lstStyle/>
+          <a:p>
+            <a:pPr algn="ctr"/>
+          </a:p>
+        </p:txBody>
+      </p:sp>
+      <p:sp>
+        <p:nvSpPr>
+          <p:cNvPr id="25" name="TextBox 24"/>
+          <p:cNvSpPr txBox="1"/>
+          <p:nvPr/>
+        </p:nvSpPr>
+        <p:spPr>
+          <a:xfrm>
+            <a:off x="9052560" y="2423160"/>
+            <a:ext cx="2194560" cy="731520"/>
+          </a:xfrm>
+          <a:prstGeom prst="rect">
+            <a:avLst/>
+          </a:prstGeom>
+          <a:noFill/>
+        </p:spPr>
+        <p:txBody>
+          <a:bodyPr wrap="square" anchor="t" lIns="45720" rIns="45720" tIns="27432" bIns="27432">
+            <a:spAutoFit/>
+          </a:bodyPr>
+          <a:lstStyle/>
+          <a:p>
+            <a:pPr algn="ctr">
+              <a:spcAft>
+                <a:spcPts val="400"/>
+              </a:spcAft>
+            </a:pPr>
+            <a:r>
+              <a:rPr sz="1900" b="1">
+                <a:solidFill>
+                  <a:srgbClr val="E8EAF0"/>
+                </a:solidFill>
+                <a:latin typeface="Montserrat Alternates"/>
+              </a:rPr>
+              <a:t>Runaway builds</a:t>
+            </a:r>
+          </a:p>
+        </p:txBody>
+      </p:sp>
+      <p:sp>
+        <p:nvSpPr>
+          <p:cNvPr id="26" name="TextBox 25"/>
+          <p:cNvSpPr txBox="1"/>
+          <p:nvPr/>
+        </p:nvSpPr>
+        <p:spPr>
+          <a:xfrm>
+            <a:off x="9098280" y="3200400"/>
+            <a:ext cx="2103120" cy="1188720"/>
+          </a:xfrm>
+          <a:prstGeom prst="rect">
+            <a:avLst/>
+          </a:prstGeom>
+          <a:noFill/>
+        </p:spPr>
+        <p:txBody>
+          <a:bodyPr wrap="square" anchor="t" lIns="45720" rIns="45720" tIns="27432" bIns="27432">
+            <a:spAutoFit/>
+          </a:bodyPr>
+          <a:lstStyle/>
+          <a:p>
+            <a:pPr algn="ctr">
+              <a:spcAft>
+                <a:spcPts val="400"/>
+              </a:spcAft>
+            </a:pPr>
+            <a:r>
+              <a:rPr sz="1500" b="0">
+                <a:solidFill>
+                  <a:srgbClr val="8B93A1"/>
+                </a:solidFill>
+                <a:latin typeface="Red Hat Display"/>
+              </a:rPr>
+              <a:t>Refuse a document that never settles before it burns runs.</a:t>
+            </a:r>
+          </a:p>
+        </p:txBody>
+      </p:sp>
+      <p:sp>
+        <p:nvSpPr>
+          <p:cNvPr id="27" name="TextBox 26"/>
+          <p:cNvSpPr txBox="1"/>
+          <p:nvPr/>
+        </p:nvSpPr>
+        <p:spPr>
+          <a:xfrm>
+            <a:off x="9006840" y="4434840"/>
+            <a:ext cx="2286000" cy="457200"/>
+          </a:xfrm>
+          <a:prstGeom prst="rect">
+            <a:avLst/>
+          </a:prstGeom>
+          <a:noFill/>
+        </p:spPr>
+        <p:txBody>
+          <a:bodyPr wrap="square" anchor="t" lIns="45720" rIns="45720" tIns="27432" bIns="27432">
+            <a:spAutoFit/>
+          </a:bodyPr>
+          <a:lstStyle/>
+          <a:p>
+            <a:pPr algn="ctr">
+              <a:spcAft>
+                <a:spcPts val="400"/>
+              </a:spcAft>
+            </a:pPr>
+            <a:r>
+              <a:rPr sz="1200" b="0">
+                <a:solidFill>
+                  <a:srgbClr val="A78BFA"/>
+                </a:solidFill>
+                <a:latin typeface="Red Hat Mono"/>
+              </a:rPr>
+              <a:t>auxflow classify</a:t>
+            </a:r>
+          </a:p>
+        </p:txBody>
+      </p:sp>
+      <p:sp>
+        <p:nvSpPr>
+          <p:cNvPr id="28" name="TextBox 27"/>
+          <p:cNvSpPr txBox="1"/>
+          <p:nvPr/>
+        </p:nvSpPr>
+        <p:spPr>
+          <a:xfrm>
+            <a:off x="822960" y="5440680"/>
+            <a:ext cx="10515600" cy="548640"/>
+          </a:xfrm>
+          <a:prstGeom prst="rect">
+            <a:avLst/>
+          </a:prstGeom>
+          <a:noFill/>
+        </p:spPr>
+        <p:txBody>
+          <a:bodyPr wrap="square" anchor="t" lIns="45720" rIns="45720" tIns="27432" bIns="27432">
+            <a:spAutoFit/>
+          </a:bodyPr>
+          <a:lstStyle/>
+          <a:p>
+            <a:pPr algn="l">
+              <a:spcAft>
+                <a:spcPts val="400"/>
+              </a:spcAft>
+            </a:pPr>
+            <a:r>
+              <a:rPr sz="1800" b="0">
+                <a:solidFill>
+                  <a:srgbClr val="8B93A1"/>
+                </a:solidFill>
+                <a:latin typeface="Red Hat Display"/>
+              </a:rPr>
+              <a:t>pip install auxflow. Python 3.12 or newer, no runtime dependencies, MIT license.</a:t>
+            </a:r>
+          </a:p>
+        </p:txBody>
+      </p:sp>
+    </p:spTree>
+  </p:cSld>
+  <p:clrMapOvr>
+    <a:masterClrMapping/>
+  </p:clrMapOvr>
+</p:sld>
+</file>
+
+<file path=ppt/slides/slide14.xml><?xml version="1.0" encoding="utf-8"?>
+<p:sld xmlns:a="http://schemas.openxmlformats.org/drawingml/2006/main" xmlns:p="http://schemas.openxmlformats.org/presentationml/2006/main" xmlns:r="http://schemas.openxmlformats.org/officeDocument/2006/relationships">
+  <p:cSld>
+    <p:bg>
+      <p:bgPr>
+        <a:solidFill>
+          <a:srgbClr val="0F1115"/>
+        </a:solidFill>
+        <a:effectLst/>
+      </p:bgPr>
+    </p:bg>
+    <p:spTree>
+      <p:nvGrpSpPr>
+        <p:cNvPr id="1" name=""/>
+        <p:cNvGrpSpPr/>
+        <p:nvPr/>
+      </p:nvGrpSpPr>
+      <p:grpSpPr/>
+      <p:sp>
+        <p:nvSpPr>
+          <p:cNvPr id="2" name="Title 1"/>
+          <p:cNvSpPr>
+            <a:spLocks noGrp="1"/>
+          </p:cNvSpPr>
+          <p:nvPr>
+            <p:ph type="title"/>
+          </p:nvPr>
+        </p:nvSpPr>
+        <p:spPr>
+          <a:xfrm>
+            <a:off x="685800" y="960120"/>
+            <a:ext cx="10789920" cy="731520"/>
+          </a:xfrm>
+        </p:spPr>
+        <p:txBody>
+          <a:bodyPr wrap="square" anchor="t" lIns="45720" rIns="45720" tIns="27432" bIns="27432"/>
+          <a:lstStyle/>
+          <a:p>
+            <a:pPr algn="l"/>
+            <a:r>
+              <a:rPr sz="3200" b="1">
+                <a:solidFill>
+                  <a:srgbClr val="E8EAF0"/>
+                </a:solidFill>
+                <a:latin typeface="Montserrat Alternates"/>
+              </a:rPr>
+              <a:t>Questions you may have</a:t>
+            </a:r>
+          </a:p>
+        </p:txBody>
+      </p:sp>
+      <p:sp>
+        <p:nvSpPr>
+          <p:cNvPr id="3" name="Rectangle 2"/>
+          <p:cNvSpPr/>
+          <p:nvPr/>
+        </p:nvSpPr>
+        <p:spPr>
+          <a:xfrm>
+            <a:off x="731520" y="566928"/>
+            <a:ext cx="320040" cy="45720"/>
+          </a:xfrm>
+          <a:prstGeom prst="rect">
+            <a:avLst/>
+          </a:prstGeom>
+          <a:solidFill>
+            <a:srgbClr val="A78BFA"/>
+          </a:solidFill>
+          <a:ln w="12700">
+            <a:solidFill>
+              <a:srgbClr val="A78BFA"/>
+            </a:solidFill>
+          </a:ln>
+          <a:effectLst/>
+        </p:spPr>
+        <p:style>
+          <a:lnRef idx="1">
+            <a:schemeClr val="accent1"/>
+          </a:lnRef>
+          <a:fillRef idx="3">
+            <a:schemeClr val="accent1"/>
+          </a:fillRef>
+          <a:effectRef idx="2">
+            <a:schemeClr val="accent1"/>
+          </a:effectRef>
+          <a:fontRef idx="minor">
+            <a:schemeClr val="lt1"/>
+          </a:fontRef>
+        </p:style>
+        <p:txBody>
+          <a:bodyPr rtlCol="0" anchor="ctr"/>
+          <a:lstStyle/>
+          <a:p>
+            <a:pPr algn="ctr"/>
+          </a:p>
+        </p:txBody>
+      </p:sp>
+      <p:sp>
+        <p:nvSpPr>
+          <p:cNvPr id="4" name="TextBox 3"/>
+          <p:cNvSpPr txBox="1"/>
+          <p:nvPr/>
+        </p:nvSpPr>
+        <p:spPr>
+          <a:xfrm>
+            <a:off x="685800" y="658368"/>
+            <a:ext cx="8229600" cy="320040"/>
+          </a:xfrm>
+          <a:prstGeom prst="rect">
+            <a:avLst/>
+          </a:prstGeom>
+          <a:noFill/>
+        </p:spPr>
+        <p:txBody>
+          <a:bodyPr wrap="square" anchor="t" lIns="45720" rIns="45720" tIns="27432" bIns="27432">
+            <a:spAutoFit/>
+          </a:bodyPr>
+          <a:lstStyle/>
+          <a:p>
+            <a:pPr algn="l">
+              <a:spcAft>
+                <a:spcPts val="400"/>
+              </a:spcAft>
+            </a:pPr>
+            <a:r>
+              <a:rPr sz="1200" b="1">
+                <a:solidFill>
+                  <a:srgbClr val="A78BFA"/>
+                </a:solidFill>
+                <a:latin typeface="Montserrat Alternates"/>
+              </a:rPr>
+              <a:t>FAQ</a:t>
+            </a:r>
+          </a:p>
+        </p:txBody>
+      </p:sp>
+      <p:sp>
+        <p:nvSpPr>
+          <p:cNvPr id="5" name="Rectangle 4"/>
+          <p:cNvSpPr/>
+          <p:nvPr/>
+        </p:nvSpPr>
+        <p:spPr>
+          <a:xfrm>
+            <a:off x="731520" y="6263640"/>
+            <a:ext cx="10725912" cy="9144"/>
+          </a:xfrm>
+          <a:prstGeom prst="rect">
+            <a:avLst/>
+          </a:prstGeom>
+          <a:solidFill>
+            <a:srgbClr val="2A2F3A"/>
+          </a:solidFill>
+          <a:ln w="12700">
+            <a:solidFill>
+              <a:srgbClr val="2A2F3A"/>
+            </a:solidFill>
+          </a:ln>
+          <a:effectLst/>
+        </p:spPr>
+        <p:style>
+          <a:lnRef idx="1">
+            <a:schemeClr val="accent1"/>
+          </a:lnRef>
+          <a:fillRef idx="3">
+            <a:schemeClr val="accent1"/>
+          </a:fillRef>
+          <a:effectRef idx="2">
+            <a:schemeClr val="accent1"/>
+          </a:effectRef>
+          <a:fontRef idx="minor">
+            <a:schemeClr val="lt1"/>
+          </a:fontRef>
+        </p:style>
+        <p:txBody>
+          <a:bodyPr rtlCol="0" anchor="ctr"/>
+          <a:lstStyle/>
+          <a:p>
+            <a:pPr algn="ctr"/>
+          </a:p>
+        </p:txBody>
+      </p:sp>
+      <p:sp>
+        <p:nvSpPr>
+          <p:cNvPr id="6" name="TextBox 5"/>
+          <p:cNvSpPr txBox="1"/>
+          <p:nvPr/>
+        </p:nvSpPr>
+        <p:spPr>
+          <a:xfrm>
+            <a:off x="685800" y="6355080"/>
+            <a:ext cx="3657600" cy="274320"/>
+          </a:xfrm>
+          <a:prstGeom prst="rect">
+            <a:avLst/>
+          </a:prstGeom>
+          <a:noFill/>
+        </p:spPr>
+        <p:txBody>
+          <a:bodyPr wrap="square" anchor="t" lIns="45720" rIns="45720" tIns="27432" bIns="27432">
+            <a:spAutoFit/>
+          </a:bodyPr>
+          <a:lstStyle/>
+          <a:p>
+            <a:pPr algn="l">
+              <a:spcAft>
+                <a:spcPts val="400"/>
+              </a:spcAft>
+            </a:pPr>
+            <a:r>
+              <a:rPr sz="1100" b="0">
+                <a:solidFill>
+                  <a:srgbClr val="8B93A1"/>
+                </a:solidFill>
+                <a:latin typeface="Red Hat Display"/>
+              </a:rPr>
+              <a:t>AuxFlow</a:t>
+            </a:r>
+          </a:p>
+        </p:txBody>
+      </p:sp>
+      <p:sp>
+        <p:nvSpPr>
+          <p:cNvPr id="7" name="TextBox 6"/>
+          <p:cNvSpPr txBox="1"/>
+          <p:nvPr/>
+        </p:nvSpPr>
+        <p:spPr>
+          <a:xfrm>
+            <a:off x="10789920" y="6355080"/>
+            <a:ext cx="731520" cy="274320"/>
+          </a:xfrm>
+          <a:prstGeom prst="rect">
+            <a:avLst/>
+          </a:prstGeom>
+          <a:noFill/>
+        </p:spPr>
+        <p:txBody>
+          <a:bodyPr wrap="square" anchor="t" lIns="45720" rIns="45720" tIns="27432" bIns="27432">
+            <a:spAutoFit/>
+          </a:bodyPr>
+          <a:lstStyle/>
+          <a:p>
+            <a:pPr algn="r">
+              <a:spcAft>
+                <a:spcPts val="400"/>
+              </a:spcAft>
+            </a:pPr>
+            <a:r>
+              <a:rPr sz="1100" b="0">
+                <a:solidFill>
+                  <a:srgbClr val="8B93A1"/>
+                </a:solidFill>
+                <a:latin typeface="Red Hat Display"/>
+              </a:rPr>
+              <a:t>14</a:t>
             </a:r>
           </a:p>
         </p:txBody>
@@ -12657,8 +14327,8 @@
           <p:nvPr/>
         </p:nvGraphicFramePr>
         <p:xfrm>
-          <a:off x="731520" y="1828800"/>
-          <a:ext cx="7315200" cy="3749039"/>
+          <a:off x="731520" y="1737360"/>
+          <a:ext cx="7315200" cy="3566160"/>
         </p:xfrm>
         <a:graphic>
           <a:graphicData uri="http://schemas.openxmlformats.org/drawingml/2006/chart">
